--- a/presentation/Enterprise_Buddy_Pitch.pptx
+++ b/presentation/Enterprise_Buddy_Pitch.pptx
@@ -1,17 +1,20 @@
 
 <file path=ppt/presentation.xml><?xml version="1.0" encoding="utf-8"?>
-<p:presentation xmlns:a="http://schemas.openxmlformats.org/drawingml/2006/main" xmlns:r="http://schemas.openxmlformats.org/officeDocument/2006/relationships" xmlns:p="http://schemas.openxmlformats.org/presentationml/2006/main" saveSubsetFonts="1" autoCompressPictures="0">
+<p:presentation xmlns:p="http://schemas.openxmlformats.org/presentationml/2006/main" xmlns:a="http://schemas.openxmlformats.org/drawingml/2006/main" xmlns:r="http://schemas.openxmlformats.org/officeDocument/2006/relationships" firstSlideNum="1">
   <p:sldMasterIdLst>
-    <p:sldMasterId id="2147483648" r:id="rId1"/>
+    <p:sldMasterId id="2147483648" r:id="rId0"/>
   </p:sldMasterIdLst>
+  <p:notesMasterIdLst>
+    <p:notesMasterId r:id="rId8"/>
+  </p:notesMasterIdLst>
   <p:sldIdLst>
-    <p:sldId id="256" r:id="rId7"/>
-    <p:sldId id="257" r:id="rId9"/>
-    <p:sldId id="258" r:id="rId10"/>
-    <p:sldId id="259" r:id="rId11"/>
-    <p:sldId id="260" r:id="rId12"/>
-    <p:sldId id="261" r:id="rId13"/>
-    <p:sldId id="262" r:id="rId14"/>
+    <p:sldId id="256" r:id="rId1"/>
+    <p:sldId id="257" r:id="rId2"/>
+    <p:sldId id="258" r:id="rId3"/>
+    <p:sldId id="259" r:id="rId4"/>
+    <p:sldId id="260" r:id="rId5"/>
+    <p:sldId id="261" r:id="rId6"/>
+    <p:sldId id="262" r:id="rId7"/>
   </p:sldIdLst>
   <p:sldSz cx="12191695" cy="6858000" type="screen4x3"/>
   <p:notesSz cx="6858000" cy="9144000"/>
@@ -114,7 +117,7 @@
 </file>
 
 <file path=ppt/notesMasters/notesMaster1.xml><?xml version="1.0" encoding="utf-8"?>
-<p:notesMaster xmlns:a="http://schemas.openxmlformats.org/drawingml/2006/main" xmlns:p="http://schemas.openxmlformats.org/presentationml/2006/main" xmlns:r="http://schemas.openxmlformats.org/officeDocument/2006/relationships">
+<p:notesMaster xmlns:p="http://schemas.openxmlformats.org/presentationml/2006/main" xmlns:a="http://schemas.openxmlformats.org/drawingml/2006/main">
   <p:cSld>
     <p:bg>
       <p:bgRef idx="1001">
@@ -162,6 +165,7 @@
             </a:lvl1pPr>
           </a:lstStyle>
           <a:p>
+            <a:pPr/>
             <a:endParaRPr lang="en-US"/>
           </a:p>
         </p:txBody>
@@ -193,6 +197,7 @@
             </a:lvl1pPr>
           </a:lstStyle>
           <a:p>
+            <a:pPr/>
             <a:fld id="{0F89C1C7-3DCD-1040-A9CF-14679D8B5DDD}" type="datetimeFigureOut">
               <a:rPr lang="en-US" smtClean="0"/>
               <a:t>10/17/16</a:t>
@@ -230,6 +235,7 @@
           <a:bodyPr vert="horz" lIns="91440" tIns="45720" rIns="91440" bIns="45720" rtlCol="0" anchor="ctr"/>
           <a:lstStyle/>
           <a:p>
+            <a:pPr/>
             <a:endParaRPr lang="en-US"/>
           </a:p>
         </p:txBody>
@@ -262,6 +268,7 @@
               <a:rPr lang="en-US" smtClean="0"/>
               <a:t>Click to edit Master text styles</a:t>
             </a:r>
+            <a:endParaRPr/>
           </a:p>
           <a:p>
             <a:pPr lvl="1"/>
@@ -269,6 +276,7 @@
               <a:rPr lang="en-US" smtClean="0"/>
               <a:t>Second level</a:t>
             </a:r>
+            <a:endParaRPr/>
           </a:p>
           <a:p>
             <a:pPr lvl="2"/>
@@ -276,6 +284,7 @@
               <a:rPr lang="en-US" smtClean="0"/>
               <a:t>Third level</a:t>
             </a:r>
+            <a:endParaRPr/>
           </a:p>
           <a:p>
             <a:pPr lvl="3"/>
@@ -283,6 +292,7 @@
               <a:rPr lang="en-US" smtClean="0"/>
               <a:t>Fourth level</a:t>
             </a:r>
+            <a:endParaRPr/>
           </a:p>
           <a:p>
             <a:pPr lvl="4"/>
@@ -321,6 +331,7 @@
             </a:lvl1pPr>
           </a:lstStyle>
           <a:p>
+            <a:pPr/>
             <a:endParaRPr lang="en-US"/>
           </a:p>
         </p:txBody>
@@ -352,6 +363,7 @@
             </a:lvl1pPr>
           </a:lstStyle>
           <a:p>
+            <a:pPr/>
             <a:fld id="{BB5E49A5-4136-284D-997B-48E1D791AD67}" type="slidenum">
               <a:rPr lang="en-US" smtClean="0"/>
               <a:t>‹#›</a:t>
@@ -361,11 +373,6 @@
         </p:txBody>
       </p:sp>
     </p:spTree>
-    <p:extLst>
-      <p:ext uri="{BB962C8B-B14F-4D97-AF65-F5344CB8AC3E}">
-        <p14:creationId xmlns:p14="http://schemas.microsoft.com/office/powerpoint/2010/main" val="2623252185"/>
-      </p:ext>
-    </p:extLst>
   </p:cSld>
   <p:clrMap bg1="lt1" tx1="dk1" bg2="lt2" tx2="dk2" accent1="accent1" accent2="accent2" accent3="accent3" accent4="accent4" accent5="accent5" accent6="accent6" hlink="hlink" folHlink="folHlink"/>
   <p:notesStyle>
@@ -464,7 +471,7 @@
 </file>
 
 <file path=ppt/notesSlides/notesSlide1.xml><?xml version="1.0" encoding="utf-8"?>
-<p:notes xmlns:a="http://schemas.openxmlformats.org/drawingml/2006/main" xmlns:p="http://schemas.openxmlformats.org/presentationml/2006/main" xmlns:r="http://schemas.openxmlformats.org/officeDocument/2006/relationships">
+<p:notes xmlns:p="http://schemas.openxmlformats.org/presentationml/2006/main" xmlns:a="http://schemas.openxmlformats.org/drawingml/2006/main">
   <p:cSld>
     <p:spTree>
       <p:nvGrpSpPr>
@@ -491,6 +498,10 @@
           </p:nvPr>
         </p:nvSpPr>
         <p:spPr/>
+        <p:txBody>
+          <a:bodyPr/>
+          <a:p/>
+        </p:txBody>
       </p:sp>
       <p:sp>
         <p:nvSpPr>
@@ -499,7 +510,7 @@
             <a:spLocks noGrp="1"/>
           </p:cNvSpPr>
           <p:nvPr>
-            <p:ph type="body" idx="3" sz="quarter"/>
+            <p:ph type="body" sz="quarter" idx="3"/>
           </p:nvPr>
         </p:nvSpPr>
         <p:spPr/>
@@ -507,52 +518,64 @@
           <a:bodyPr/>
           <a:lstStyle/>
           <a:p>
+            <a:pPr/>
             <a:r>
               <a:rPr sz="1100">
                 <a:latin typeface="Calibri"/>
               </a:rPr>
               <a:t>Track 2, Hackerdorm — judges, Track 2: WorkBuddy Track.</a:t>
             </a:r>
-          </a:p>
-          <a:p>
+            <a:endParaRPr/>
+          </a:p>
+          <a:p>
+            <a:pPr/>
             <a:r>
               <a:rPr sz="1100">
                 <a:latin typeface="Calibri"/>
               </a:rPr>
               <a:t>Slide 1 — Criterion 1: real problem and user value.</a:t>
             </a:r>
-          </a:p>
-          <a:p>
+            <a:endParaRPr/>
+          </a:p>
+          <a:p>
+            <a:pPr/>
             <a:r>
               <a:rPr sz="1100">
                 <a:latin typeface="Calibri"/>
               </a:rPr>
               <a:t>Picture a student who sells kuih between lectures.</a:t>
             </a:r>
-          </a:p>
-          <a:p>
+            <a:endParaRPr/>
+          </a:p>
+          <a:p>
+            <a:pPr/>
             <a:r>
               <a:rPr sz="1100">
                 <a:latin typeface="Calibri"/>
               </a:rPr>
               <a:t>Twenty-two sample customers in our demo WhatsApp. (test S4)</a:t>
             </a:r>
-          </a:p>
-          <a:p>
+            <a:endParaRPr/>
+          </a:p>
+          <a:p>
+            <a:pPr/>
             <a:r>
               <a:rPr sz="1100">
                 <a:latin typeface="Calibri"/>
               </a:rPr>
               <a:t>Touch 'n Go, online banking, cash — verified on Money Flow. (test S7)</a:t>
             </a:r>
-          </a:p>
-          <a:p>
+            <a:endParaRPr/>
+          </a:p>
+          <a:p>
+            <a:pPr/>
             <a:r>
               <a:rPr sz="1100">
                 <a:latin typeface="Calibri"/>
               </a:rPr>
               <a:t>She can't see margins, stockouts or supplier orders. Today's slide 5 shows the alert that fixes that.</a:t>
             </a:r>
+            <a:endParaRPr/>
           </a:p>
         </p:txBody>
       </p:sp>
@@ -563,10 +586,14 @@
             <a:spLocks noGrp="1"/>
           </p:cNvSpPr>
           <p:nvPr>
-            <p:ph type="sldNum" idx="5" sz="quarter"/>
+            <p:ph type="sldNum" sz="quarter" idx="5"/>
           </p:nvPr>
         </p:nvSpPr>
         <p:spPr/>
+        <p:txBody>
+          <a:bodyPr/>
+          <a:p/>
+        </p:txBody>
       </p:sp>
     </p:spTree>
   </p:cSld>
@@ -577,11 +604,11 @@
 </file>
 
 <file path=ppt/notesSlides/notesSlide2.xml><?xml version="1.0" encoding="utf-8"?>
-<p:notes xmlns:a="http://schemas.openxmlformats.org/drawingml/2006/main" xmlns:p="http://schemas.openxmlformats.org/presentationml/2006/main" xmlns:r="http://schemas.openxmlformats.org/officeDocument/2006/relationships">
+<p:notes xmlns:p="http://schemas.openxmlformats.org/presentationml/2006/main" xmlns:a="http://schemas.openxmlformats.org/drawingml/2006/main">
   <p:cSld>
     <p:spTree>
       <p:nvGrpSpPr>
-        <p:cNvPr id="1" name=""/>
+        <p:cNvPr id="5" name=""/>
         <p:cNvGrpSpPr/>
         <p:nvPr/>
       </p:nvGrpSpPr>
@@ -595,7 +622,7 @@
       </p:grpSpPr>
       <p:sp>
         <p:nvSpPr>
-          <p:cNvPr id="2" name="Slide Image Placeholder 1"/>
+          <p:cNvPr id="6" name="Slide Image Placeholder 1"/>
           <p:cNvSpPr>
             <a:spLocks noGrp="1"/>
           </p:cNvSpPr>
@@ -604,15 +631,19 @@
           </p:nvPr>
         </p:nvSpPr>
         <p:spPr/>
-      </p:sp>
-      <p:sp>
-        <p:nvSpPr>
-          <p:cNvPr id="3" name="Notes Placeholder 2"/>
-          <p:cNvSpPr>
-            <a:spLocks noGrp="1"/>
-          </p:cNvSpPr>
-          <p:nvPr>
-            <p:ph type="body" idx="3" sz="quarter"/>
+        <p:txBody>
+          <a:bodyPr/>
+          <a:p/>
+        </p:txBody>
+      </p:sp>
+      <p:sp>
+        <p:nvSpPr>
+          <p:cNvPr id="7" name="Notes Placeholder 2"/>
+          <p:cNvSpPr>
+            <a:spLocks noGrp="1"/>
+          </p:cNvSpPr>
+          <p:nvPr>
+            <p:ph type="body" sz="quarter" idx="3"/>
           </p:nvPr>
         </p:nvSpPr>
         <p:spPr/>
@@ -620,58 +651,72 @@
           <a:bodyPr/>
           <a:lstStyle/>
           <a:p>
+            <a:pPr/>
             <a:r>
               <a:rPr sz="1100">
                 <a:latin typeface="Calibri"/>
               </a:rPr>
               <a:t>Slide 2 — Criterion 3: meaningful use of WorkBuddy.</a:t>
             </a:r>
-          </a:p>
-          <a:p>
+            <a:endParaRPr/>
+          </a:p>
+          <a:p>
+            <a:pPr/>
             <a:r>
               <a:rPr sz="1100">
                 <a:latin typeface="Calibri"/>
               </a:rPr>
               <a:t>Answer the core judging question out loud: yes.</a:t>
             </a:r>
-          </a:p>
-          <a:p>
+            <a:endParaRPr/>
+          </a:p>
+          <a:p>
+            <a:pPr/>
             <a:r>
               <a:rPr sz="1100">
                 <a:latin typeface="Calibri"/>
               </a:rPr>
               <a:t>Agent runtime = the CodeBuddy CLI inside WorkBuddy (test F1: codebuddy 2.164.0, stream-json).</a:t>
             </a:r>
-          </a:p>
-          <a:p>
+            <a:endParaRPr/>
+          </a:p>
+          <a:p>
+            <a:pPr/>
             <a:r>
               <a:rPr sz="1100">
                 <a:latin typeface="Calibri"/>
               </a:rPr>
               <a:t>Enterprise Buddy's server and screens are the viewing and action layer around it.</a:t>
             </a:r>
-          </a:p>
-          <a:p>
+            <a:endParaRPr/>
+          </a:p>
+          <a:p>
+            <a:pPr/>
             <a:r>
               <a:rPr sz="1100">
                 <a:latin typeface="Calibri"/>
               </a:rPr>
               <a:t>Tool whitelist restricts the agent to read-only commands; everything that changes anything goes through owner approval. (test F2)</a:t>
             </a:r>
-          </a:p>
-        </p:txBody>
-      </p:sp>
-      <p:sp>
-        <p:nvSpPr>
-          <p:cNvPr id="4" name="Slide Number Placeholder 3"/>
-          <p:cNvSpPr>
-            <a:spLocks noGrp="1"/>
-          </p:cNvSpPr>
-          <p:nvPr>
-            <p:ph type="sldNum" idx="5" sz="quarter"/>
+            <a:endParaRPr/>
+          </a:p>
+        </p:txBody>
+      </p:sp>
+      <p:sp>
+        <p:nvSpPr>
+          <p:cNvPr id="8" name="Slide Number Placeholder 3"/>
+          <p:cNvSpPr>
+            <a:spLocks noGrp="1"/>
+          </p:cNvSpPr>
+          <p:nvPr>
+            <p:ph type="sldNum" sz="quarter" idx="5"/>
           </p:nvPr>
         </p:nvSpPr>
         <p:spPr/>
+        <p:txBody>
+          <a:bodyPr/>
+          <a:p/>
+        </p:txBody>
       </p:sp>
     </p:spTree>
   </p:cSld>
@@ -682,11 +727,11 @@
 </file>
 
 <file path=ppt/notesSlides/notesSlide3.xml><?xml version="1.0" encoding="utf-8"?>
-<p:notes xmlns:a="http://schemas.openxmlformats.org/drawingml/2006/main" xmlns:p="http://schemas.openxmlformats.org/presentationml/2006/main" xmlns:r="http://schemas.openxmlformats.org/officeDocument/2006/relationships">
+<p:notes xmlns:p="http://schemas.openxmlformats.org/presentationml/2006/main" xmlns:a="http://schemas.openxmlformats.org/drawingml/2006/main">
   <p:cSld>
     <p:spTree>
       <p:nvGrpSpPr>
-        <p:cNvPr id="1" name=""/>
+        <p:cNvPr id="9" name=""/>
         <p:cNvGrpSpPr/>
         <p:nvPr/>
       </p:nvGrpSpPr>
@@ -700,7 +745,7 @@
       </p:grpSpPr>
       <p:sp>
         <p:nvSpPr>
-          <p:cNvPr id="2" name="Slide Image Placeholder 1"/>
+          <p:cNvPr id="10" name="Slide Image Placeholder 1"/>
           <p:cNvSpPr>
             <a:spLocks noGrp="1"/>
           </p:cNvSpPr>
@@ -709,15 +754,19 @@
           </p:nvPr>
         </p:nvSpPr>
         <p:spPr/>
-      </p:sp>
-      <p:sp>
-        <p:nvSpPr>
-          <p:cNvPr id="3" name="Notes Placeholder 2"/>
-          <p:cNvSpPr>
-            <a:spLocks noGrp="1"/>
-          </p:cNvSpPr>
-          <p:nvPr>
-            <p:ph type="body" idx="3" sz="quarter"/>
+        <p:txBody>
+          <a:bodyPr/>
+          <a:p/>
+        </p:txBody>
+      </p:sp>
+      <p:sp>
+        <p:nvSpPr>
+          <p:cNvPr id="11" name="Notes Placeholder 2"/>
+          <p:cNvSpPr>
+            <a:spLocks noGrp="1"/>
+          </p:cNvSpPr>
+          <p:nvPr>
+            <p:ph type="body" sz="quarter" idx="3"/>
           </p:nvPr>
         </p:nvSpPr>
         <p:spPr/>
@@ -725,66 +774,82 @@
           <a:bodyPr/>
           <a:lstStyle/>
           <a:p>
+            <a:pPr/>
             <a:r>
               <a:rPr sz="1100">
                 <a:latin typeface="Calibri"/>
               </a:rPr>
               <a:t>Slide 3 — Criteria 2 and 4: agentic workflow, end-to-end.</a:t>
             </a:r>
-          </a:p>
-          <a:p>
+            <a:endParaRPr/>
+          </a:p>
+          <a:p>
+            <a:pPr/>
             <a:r>
               <a:rPr sz="1100">
                 <a:latin typeface="Calibri"/>
               </a:rPr>
               <a:t>Single prompt, full chain. No intermediate guidance.</a:t>
             </a:r>
-          </a:p>
-          <a:p>
+            <a:endParaRPr/>
+          </a:p>
+          <a:p>
+            <a:pPr/>
             <a:r>
               <a:rPr sz="1100">
                 <a:latin typeface="Calibri"/>
               </a:rPr>
               <a:t>Departments are real: Operations, Strategy, Guides, Marketing, Reporting, Verifier, Technology.</a:t>
             </a:r>
-          </a:p>
-          <a:p>
+            <a:endParaRPr/>
+          </a:p>
+          <a:p>
+            <a:pPr/>
             <a:r>
               <a:rPr sz="1100">
                 <a:latin typeface="Calibri"/>
               </a:rPr>
               <a:t>Map: 60 real food places around UM (26 cafe, 23 fast food, 8 food court). (test 'Market map — competitors near UM')</a:t>
             </a:r>
-          </a:p>
-          <a:p>
+            <a:endParaRPr/>
+          </a:p>
+          <a:p>
+            <a:pPr/>
             <a:r>
               <a:rPr sz="1100">
                 <a:latin typeface="Calibri"/>
               </a:rPr>
               <a:t>Plan record: run 171822-c203 / chat 1010174017-288a.</a:t>
             </a:r>
-          </a:p>
-          <a:p>
+            <a:endParaRPr/>
+          </a:p>
+          <a:p>
+            <a:pPr/>
             <a:r>
               <a:rPr sz="1100">
                 <a:latin typeface="Calibri"/>
               </a:rPr>
               <a:t>Chat 'bought sugar, paid TNG' test: 7 app actions, all correct, number check passed.</a:t>
             </a:r>
-          </a:p>
-        </p:txBody>
-      </p:sp>
-      <p:sp>
-        <p:nvSpPr>
-          <p:cNvPr id="4" name="Slide Number Placeholder 3"/>
-          <p:cNvSpPr>
-            <a:spLocks noGrp="1"/>
-          </p:cNvSpPr>
-          <p:nvPr>
-            <p:ph type="sldNum" idx="5" sz="quarter"/>
+            <a:endParaRPr/>
+          </a:p>
+        </p:txBody>
+      </p:sp>
+      <p:sp>
+        <p:nvSpPr>
+          <p:cNvPr id="12" name="Slide Number Placeholder 3"/>
+          <p:cNvSpPr>
+            <a:spLocks noGrp="1"/>
+          </p:cNvSpPr>
+          <p:nvPr>
+            <p:ph type="sldNum" sz="quarter" idx="5"/>
           </p:nvPr>
         </p:nvSpPr>
         <p:spPr/>
+        <p:txBody>
+          <a:bodyPr/>
+          <a:p/>
+        </p:txBody>
       </p:sp>
     </p:spTree>
   </p:cSld>
@@ -795,11 +860,11 @@
 </file>
 
 <file path=ppt/notesSlides/notesSlide4.xml><?xml version="1.0" encoding="utf-8"?>
-<p:notes xmlns:a="http://schemas.openxmlformats.org/drawingml/2006/main" xmlns:p="http://schemas.openxmlformats.org/presentationml/2006/main" xmlns:r="http://schemas.openxmlformats.org/officeDocument/2006/relationships">
+<p:notes xmlns:p="http://schemas.openxmlformats.org/presentationml/2006/main" xmlns:a="http://schemas.openxmlformats.org/drawingml/2006/main">
   <p:cSld>
     <p:spTree>
       <p:nvGrpSpPr>
-        <p:cNvPr id="1" name=""/>
+        <p:cNvPr id="13" name=""/>
         <p:cNvGrpSpPr/>
         <p:nvPr/>
       </p:nvGrpSpPr>
@@ -813,7 +878,7 @@
       </p:grpSpPr>
       <p:sp>
         <p:nvSpPr>
-          <p:cNvPr id="2" name="Slide Image Placeholder 1"/>
+          <p:cNvPr id="14" name="Slide Image Placeholder 1"/>
           <p:cNvSpPr>
             <a:spLocks noGrp="1"/>
           </p:cNvSpPr>
@@ -822,15 +887,19 @@
           </p:nvPr>
         </p:nvSpPr>
         <p:spPr/>
-      </p:sp>
-      <p:sp>
-        <p:nvSpPr>
-          <p:cNvPr id="3" name="Notes Placeholder 2"/>
-          <p:cNvSpPr>
-            <a:spLocks noGrp="1"/>
-          </p:cNvSpPr>
-          <p:nvPr>
-            <p:ph type="body" idx="3" sz="quarter"/>
+        <p:txBody>
+          <a:bodyPr/>
+          <a:p/>
+        </p:txBody>
+      </p:sp>
+      <p:sp>
+        <p:nvSpPr>
+          <p:cNvPr id="15" name="Notes Placeholder 2"/>
+          <p:cNvSpPr>
+            <a:spLocks noGrp="1"/>
+          </p:cNvSpPr>
+          <p:nvPr>
+            <p:ph type="body" sz="quarter" idx="3"/>
           </p:nvPr>
         </p:nvSpPr>
         <p:spPr/>
@@ -838,66 +907,82 @@
           <a:bodyPr/>
           <a:lstStyle/>
           <a:p>
+            <a:pPr/>
             <a:r>
               <a:rPr sz="1100">
                 <a:latin typeface="Calibri"/>
               </a:rPr>
               <a:t>Slide 4 — Criterion 5: usable and verifiable results.</a:t>
             </a:r>
-          </a:p>
-          <a:p>
+            <a:endParaRPr/>
+          </a:p>
+          <a:p>
+            <a:pPr/>
             <a:r>
               <a:rPr sz="1100">
                 <a:latin typeface="Calibri"/>
               </a:rPr>
               <a:t>All four tile numbers are visible on the Money Flow screenshot on the right.</a:t>
             </a:r>
-          </a:p>
-          <a:p>
+            <a:endParaRPr/>
+          </a:p>
+          <a:p>
+            <a:pPr/>
             <a:r>
               <a:rPr sz="1100">
                 <a:latin typeface="Calibri"/>
               </a:rPr>
               <a:t>Online banking and Touch 'n Go connections are simulated feeds; the badge says SIMULATED.</a:t>
             </a:r>
-          </a:p>
-          <a:p>
+            <a:endParaRPr/>
+          </a:p>
+          <a:p>
+            <a:pPr/>
             <a:r>
               <a:rPr sz="1100">
                 <a:latin typeface="Calibri"/>
               </a:rPr>
               <a:t>Auto-reorder test S2: cookies 18 ≤ reorder 20 → 2 × 1 kg chips, MYR 39.80, sources.</a:t>
             </a:r>
-          </a:p>
-          <a:p>
+            <a:endParaRPr/>
+          </a:p>
+          <a:p>
+            <a:pPr/>
             <a:r>
               <a:rPr sz="1100">
                 <a:latin typeface="Calibri"/>
               </a:rPr>
               <a:t>Auto-reply WhatsApp test S3: 4 automatic replies, MYR 21.50 menu-priced.</a:t>
             </a:r>
-          </a:p>
-          <a:p>
+            <a:endParaRPr/>
+          </a:p>
+          <a:p>
+            <a:pPr/>
             <a:r>
               <a:rPr sz="1100">
                 <a:latin typeface="Calibri"/>
               </a:rPr>
               <a:t>Do not claim these are real revenue. They are synthetic demo data.</a:t>
             </a:r>
-          </a:p>
-        </p:txBody>
-      </p:sp>
-      <p:sp>
-        <p:nvSpPr>
-          <p:cNvPr id="4" name="Slide Number Placeholder 3"/>
-          <p:cNvSpPr>
-            <a:spLocks noGrp="1"/>
-          </p:cNvSpPr>
-          <p:nvPr>
-            <p:ph type="sldNum" idx="5" sz="quarter"/>
+            <a:endParaRPr/>
+          </a:p>
+        </p:txBody>
+      </p:sp>
+      <p:sp>
+        <p:nvSpPr>
+          <p:cNvPr id="16" name="Slide Number Placeholder 3"/>
+          <p:cNvSpPr>
+            <a:spLocks noGrp="1"/>
+          </p:cNvSpPr>
+          <p:nvPr>
+            <p:ph type="sldNum" sz="quarter" idx="5"/>
           </p:nvPr>
         </p:nvSpPr>
         <p:spPr/>
+        <p:txBody>
+          <a:bodyPr/>
+          <a:p/>
+        </p:txBody>
       </p:sp>
     </p:spTree>
   </p:cSld>
@@ -908,11 +993,11 @@
 </file>
 
 <file path=ppt/notesSlides/notesSlide5.xml><?xml version="1.0" encoding="utf-8"?>
-<p:notes xmlns:a="http://schemas.openxmlformats.org/drawingml/2006/main" xmlns:p="http://schemas.openxmlformats.org/presentationml/2006/main" xmlns:r="http://schemas.openxmlformats.org/officeDocument/2006/relationships">
+<p:notes xmlns:p="http://schemas.openxmlformats.org/presentationml/2006/main" xmlns:a="http://schemas.openxmlformats.org/drawingml/2006/main">
   <p:cSld>
     <p:spTree>
       <p:nvGrpSpPr>
-        <p:cNvPr id="1" name=""/>
+        <p:cNvPr id="17" name=""/>
         <p:cNvGrpSpPr/>
         <p:nvPr/>
       </p:nvGrpSpPr>
@@ -926,7 +1011,7 @@
       </p:grpSpPr>
       <p:sp>
         <p:nvSpPr>
-          <p:cNvPr id="2" name="Slide Image Placeholder 1"/>
+          <p:cNvPr id="18" name="Slide Image Placeholder 1"/>
           <p:cNvSpPr>
             <a:spLocks noGrp="1"/>
           </p:cNvSpPr>
@@ -935,15 +1020,19 @@
           </p:nvPr>
         </p:nvSpPr>
         <p:spPr/>
-      </p:sp>
-      <p:sp>
-        <p:nvSpPr>
-          <p:cNvPr id="3" name="Notes Placeholder 2"/>
-          <p:cNvSpPr>
-            <a:spLocks noGrp="1"/>
-          </p:cNvSpPr>
-          <p:nvPr>
-            <p:ph type="body" idx="3" sz="quarter"/>
+        <p:txBody>
+          <a:bodyPr/>
+          <a:p/>
+        </p:txBody>
+      </p:sp>
+      <p:sp>
+        <p:nvSpPr>
+          <p:cNvPr id="19" name="Notes Placeholder 2"/>
+          <p:cNvSpPr>
+            <a:spLocks noGrp="1"/>
+          </p:cNvSpPr>
+          <p:nvPr>
+            <p:ph type="body" sz="quarter" idx="3"/>
           </p:nvPr>
         </p:nvSpPr>
         <p:spPr/>
@@ -951,74 +1040,92 @@
           <a:bodyPr/>
           <a:lstStyle/>
           <a:p>
+            <a:pPr/>
             <a:r>
               <a:rPr sz="1100">
                 <a:latin typeface="Calibri"/>
               </a:rPr>
               <a:t>Slide 5 — Criterion 5 (ease-of-use) and safety.</a:t>
             </a:r>
-          </a:p>
-          <a:p>
+            <a:endParaRPr/>
+          </a:p>
+          <a:p>
+            <a:pPr/>
             <a:r>
               <a:rPr sz="1100">
                 <a:latin typeface="Calibri"/>
               </a:rPr>
               <a:t>Ease of use is our headline advantage. The chat is the product.</a:t>
             </a:r>
-          </a:p>
-          <a:p>
+            <a:endParaRPr/>
+          </a:p>
+          <a:p>
+            <a:pPr/>
             <a:r>
               <a:rPr sz="1100">
                 <a:latin typeface="Calibri"/>
               </a:rPr>
               <a:t>Involvement modes: Auto / Ask me / Approve at end (Section G.10). Live demo uses Auto.</a:t>
             </a:r>
-          </a:p>
-          <a:p>
+            <a:endParaRPr/>
+          </a:p>
+          <a:p>
+            <a:pPr/>
             <a:r>
               <a:rPr sz="1100">
                 <a:latin typeface="Calibri"/>
               </a:rPr>
               <a:t>Asks instead of guessing: 'Bug: agent assumed the customer of an unnamed order' fix; console holds unnamed orders and asks.</a:t>
             </a:r>
-          </a:p>
-          <a:p>
+            <a:endParaRPr/>
+          </a:p>
+          <a:p>
+            <a:pPr/>
             <a:r>
               <a:rPr sz="1100">
                 <a:latin typeface="Calibri"/>
               </a:rPr>
               <a:t>Undo on every app action. (test S9)</a:t>
             </a:r>
-          </a:p>
-          <a:p>
+            <a:endParaRPr/>
+          </a:p>
+          <a:p>
+            <a:pPr/>
             <a:r>
               <a:rPr sz="1100">
                 <a:latin typeface="Calibri"/>
               </a:rPr>
               <a:t>Number check: caught invented weekday figures (test S8). Now fixed and re-verified.</a:t>
             </a:r>
-          </a:p>
-          <a:p>
+            <a:endParaRPr/>
+          </a:p>
+          <a:p>
+            <a:pPr/>
             <a:r>
               <a:rPr sz="1100">
                 <a:latin typeface="Calibri"/>
               </a:rPr>
               <a:t>Payments: 'Pay (simulated)' badge; never requests cards or passwords (Section G.14).</a:t>
             </a:r>
-          </a:p>
-        </p:txBody>
-      </p:sp>
-      <p:sp>
-        <p:nvSpPr>
-          <p:cNvPr id="4" name="Slide Number Placeholder 3"/>
-          <p:cNvSpPr>
-            <a:spLocks noGrp="1"/>
-          </p:cNvSpPr>
-          <p:nvPr>
-            <p:ph type="sldNum" idx="5" sz="quarter"/>
+            <a:endParaRPr/>
+          </a:p>
+        </p:txBody>
+      </p:sp>
+      <p:sp>
+        <p:nvSpPr>
+          <p:cNvPr id="20" name="Slide Number Placeholder 3"/>
+          <p:cNvSpPr>
+            <a:spLocks noGrp="1"/>
+          </p:cNvSpPr>
+          <p:nvPr>
+            <p:ph type="sldNum" sz="quarter" idx="5"/>
           </p:nvPr>
         </p:nvSpPr>
         <p:spPr/>
+        <p:txBody>
+          <a:bodyPr/>
+          <a:p/>
+        </p:txBody>
       </p:sp>
     </p:spTree>
   </p:cSld>
@@ -1029,11 +1136,11 @@
 </file>
 
 <file path=ppt/notesSlides/notesSlide6.xml><?xml version="1.0" encoding="utf-8"?>
-<p:notes xmlns:a="http://schemas.openxmlformats.org/drawingml/2006/main" xmlns:p="http://schemas.openxmlformats.org/presentationml/2006/main" xmlns:r="http://schemas.openxmlformats.org/officeDocument/2006/relationships">
+<p:notes xmlns:p="http://schemas.openxmlformats.org/presentationml/2006/main" xmlns:a="http://schemas.openxmlformats.org/drawingml/2006/main">
   <p:cSld>
     <p:spTree>
       <p:nvGrpSpPr>
-        <p:cNvPr id="1" name=""/>
+        <p:cNvPr id="21" name=""/>
         <p:cNvGrpSpPr/>
         <p:nvPr/>
       </p:nvGrpSpPr>
@@ -1047,7 +1154,7 @@
       </p:grpSpPr>
       <p:sp>
         <p:nvSpPr>
-          <p:cNvPr id="2" name="Slide Image Placeholder 1"/>
+          <p:cNvPr id="22" name="Slide Image Placeholder 1"/>
           <p:cNvSpPr>
             <a:spLocks noGrp="1"/>
           </p:cNvSpPr>
@@ -1056,15 +1163,19 @@
           </p:nvPr>
         </p:nvSpPr>
         <p:spPr/>
-      </p:sp>
-      <p:sp>
-        <p:nvSpPr>
-          <p:cNvPr id="3" name="Notes Placeholder 2"/>
-          <p:cNvSpPr>
-            <a:spLocks noGrp="1"/>
-          </p:cNvSpPr>
-          <p:nvPr>
-            <p:ph type="body" idx="3" sz="quarter"/>
+        <p:txBody>
+          <a:bodyPr/>
+          <a:p/>
+        </p:txBody>
+      </p:sp>
+      <p:sp>
+        <p:nvSpPr>
+          <p:cNvPr id="23" name="Notes Placeholder 2"/>
+          <p:cNvSpPr>
+            <a:spLocks noGrp="1"/>
+          </p:cNvSpPr>
+          <p:nvPr>
+            <p:ph type="body" sz="quarter" idx="3"/>
           </p:nvPr>
         </p:nvSpPr>
         <p:spPr/>
@@ -1072,50 +1183,62 @@
           <a:bodyPr/>
           <a:lstStyle/>
           <a:p>
+            <a:pPr/>
             <a:r>
               <a:rPr sz="1100">
                 <a:latin typeface="Calibri"/>
               </a:rPr>
               <a:t>Slide 6 — Criterion 5: verifiable.</a:t>
             </a:r>
-          </a:p>
-          <a:p>
+            <a:endParaRPr/>
+          </a:p>
+          <a:p>
+            <a:pPr/>
             <a:r>
               <a:rPr sz="1100">
                 <a:latin typeface="Calibri"/>
               </a:rPr>
               <a:t>Every claim on the slide is a row in docs/AGENT_CONSOLE_TESTS.md (date 2026-10-10 and 2026-10-11).</a:t>
             </a:r>
-          </a:p>
-          <a:p>
+            <a:endParaRPr/>
+          </a:p>
+          <a:p>
+            <a:pPr/>
             <a:r>
               <a:rPr sz="1100">
                 <a:latin typeface="Calibri"/>
               </a:rPr>
               <a:t>If pressed for a number: every figure shown is on the test-log row, all synthetic.</a:t>
             </a:r>
-          </a:p>
-          <a:p>
+            <a:endParaRPr/>
+          </a:p>
+          <a:p>
+            <a:pPr/>
             <a:r>
               <a:rPr sz="1100">
                 <a:latin typeface="Calibri"/>
               </a:rPr>
               <a:t>Honest next step: real-user testing with 3–5 student sellers. Do not claim results we have not measured.</a:t>
             </a:r>
-          </a:p>
-        </p:txBody>
-      </p:sp>
-      <p:sp>
-        <p:nvSpPr>
-          <p:cNvPr id="4" name="Slide Number Placeholder 3"/>
-          <p:cNvSpPr>
-            <a:spLocks noGrp="1"/>
-          </p:cNvSpPr>
-          <p:nvPr>
-            <p:ph type="sldNum" idx="5" sz="quarter"/>
+            <a:endParaRPr/>
+          </a:p>
+        </p:txBody>
+      </p:sp>
+      <p:sp>
+        <p:nvSpPr>
+          <p:cNvPr id="24" name="Slide Number Placeholder 3"/>
+          <p:cNvSpPr>
+            <a:spLocks noGrp="1"/>
+          </p:cNvSpPr>
+          <p:nvPr>
+            <p:ph type="sldNum" sz="quarter" idx="5"/>
           </p:nvPr>
         </p:nvSpPr>
         <p:spPr/>
+        <p:txBody>
+          <a:bodyPr/>
+          <a:p/>
+        </p:txBody>
       </p:sp>
     </p:spTree>
   </p:cSld>
@@ -1126,11 +1249,11 @@
 </file>
 
 <file path=ppt/notesSlides/notesSlide7.xml><?xml version="1.0" encoding="utf-8"?>
-<p:notes xmlns:a="http://schemas.openxmlformats.org/drawingml/2006/main" xmlns:p="http://schemas.openxmlformats.org/presentationml/2006/main" xmlns:r="http://schemas.openxmlformats.org/officeDocument/2006/relationships">
+<p:notes xmlns:p="http://schemas.openxmlformats.org/presentationml/2006/main" xmlns:a="http://schemas.openxmlformats.org/drawingml/2006/main">
   <p:cSld>
     <p:spTree>
       <p:nvGrpSpPr>
-        <p:cNvPr id="1" name=""/>
+        <p:cNvPr id="25" name=""/>
         <p:cNvGrpSpPr/>
         <p:nvPr/>
       </p:nvGrpSpPr>
@@ -1144,7 +1267,7 @@
       </p:grpSpPr>
       <p:sp>
         <p:nvSpPr>
-          <p:cNvPr id="2" name="Slide Image Placeholder 1"/>
+          <p:cNvPr id="26" name="Slide Image Placeholder 1"/>
           <p:cNvSpPr>
             <a:spLocks noGrp="1"/>
           </p:cNvSpPr>
@@ -1153,15 +1276,19 @@
           </p:nvPr>
         </p:nvSpPr>
         <p:spPr/>
-      </p:sp>
-      <p:sp>
-        <p:nvSpPr>
-          <p:cNvPr id="3" name="Notes Placeholder 2"/>
-          <p:cNvSpPr>
-            <a:spLocks noGrp="1"/>
-          </p:cNvSpPr>
-          <p:nvPr>
-            <p:ph type="body" idx="3" sz="quarter"/>
+        <p:txBody>
+          <a:bodyPr/>
+          <a:p/>
+        </p:txBody>
+      </p:sp>
+      <p:sp>
+        <p:nvSpPr>
+          <p:cNvPr id="27" name="Notes Placeholder 2"/>
+          <p:cNvSpPr>
+            <a:spLocks noGrp="1"/>
+          </p:cNvSpPr>
+          <p:nvPr>
+            <p:ph type="body" sz="quarter" idx="3"/>
           </p:nvPr>
         </p:nvSpPr>
         <p:spPr/>
@@ -1169,42 +1296,52 @@
           <a:bodyPr/>
           <a:lstStyle/>
           <a:p>
+            <a:pPr/>
             <a:r>
               <a:rPr sz="1100">
                 <a:latin typeface="Calibri"/>
               </a:rPr>
               <a:t>Slide 7 — repeat the core judging sentence out loud.</a:t>
             </a:r>
-          </a:p>
-          <a:p>
+            <a:endParaRPr/>
+          </a:p>
+          <a:p>
+            <a:pPr/>
             <a:r>
               <a:rPr sz="1100">
                 <a:latin typeface="Calibri"/>
               </a:rPr>
               <a:t>If time runs short, drop slide 6 first; the proof survives in the speaker notes.</a:t>
             </a:r>
-          </a:p>
-          <a:p>
+            <a:endParaRPr/>
+          </a:p>
+          <a:p>
+            <a:pPr/>
             <a:r>
               <a:rPr sz="1100">
                 <a:latin typeface="Calibri"/>
               </a:rPr>
               <a:t>Open the repo and the running demo only if asked.</a:t>
             </a:r>
-          </a:p>
-        </p:txBody>
-      </p:sp>
-      <p:sp>
-        <p:nvSpPr>
-          <p:cNvPr id="4" name="Slide Number Placeholder 3"/>
-          <p:cNvSpPr>
-            <a:spLocks noGrp="1"/>
-          </p:cNvSpPr>
-          <p:nvPr>
-            <p:ph type="sldNum" idx="5" sz="quarter"/>
+            <a:endParaRPr/>
+          </a:p>
+        </p:txBody>
+      </p:sp>
+      <p:sp>
+        <p:nvSpPr>
+          <p:cNvPr id="28" name="Slide Number Placeholder 3"/>
+          <p:cNvSpPr>
+            <a:spLocks noGrp="1"/>
+          </p:cNvSpPr>
+          <p:nvPr>
+            <p:ph type="sldNum" sz="quarter" idx="5"/>
           </p:nvPr>
         </p:nvSpPr>
         <p:spPr/>
+        <p:txBody>
+          <a:bodyPr/>
+          <a:p/>
+        </p:txBody>
       </p:sp>
     </p:spTree>
   </p:cSld>
@@ -1215,7 +1352,7 @@
 </file>
 
 <file path=ppt/slideLayouts/slideLayout1.xml><?xml version="1.0" encoding="utf-8"?>
-<p:sldLayout xmlns:a="http://schemas.openxmlformats.org/drawingml/2006/main" xmlns:r="http://schemas.openxmlformats.org/officeDocument/2006/relationships" xmlns:p="http://schemas.openxmlformats.org/presentationml/2006/main" type="title" preserve="1">
+<p:sldLayout xmlns:p="http://schemas.openxmlformats.org/presentationml/2006/main" xmlns:a="http://schemas.openxmlformats.org/drawingml/2006/main" type="title">
   <p:cSld name="Title Slide">
     <p:spTree>
       <p:nvGrpSpPr>
@@ -1251,6 +1388,7 @@
           <a:bodyPr/>
           <a:lstStyle/>
           <a:p>
+            <a:pPr/>
             <a:r>
               <a:rPr lang="en-US" smtClean="0"/>
               <a:t>Click to edit Master title style</a:t>
@@ -1370,6 +1508,7 @@
             </a:lvl9pPr>
           </a:lstStyle>
           <a:p>
+            <a:pPr/>
             <a:r>
               <a:rPr lang="en-US" smtClean="0"/>
               <a:t>Click to edit Master subtitle style</a:t>
@@ -1393,6 +1532,7 @@
           <a:bodyPr/>
           <a:lstStyle/>
           <a:p>
+            <a:pPr/>
             <a:fld id="{5BCAD085-E8A6-8845-BD4E-CB4CCA059FC4}" type="datetimeFigureOut">
               <a:rPr lang="en-US" smtClean="0"/>
               <a:t>1/27/13</a:t>
@@ -1416,6 +1556,7 @@
           <a:bodyPr/>
           <a:lstStyle/>
           <a:p>
+            <a:pPr/>
             <a:endParaRPr lang="en-US"/>
           </a:p>
         </p:txBody>
@@ -1435,6 +1576,7 @@
           <a:bodyPr/>
           <a:lstStyle/>
           <a:p>
+            <a:pPr/>
             <a:fld id="{C1FF6DA9-008F-8B48-92A6-B652298478BF}" type="slidenum">
               <a:rPr lang="en-US" smtClean="0"/>
               <a:t>‹#›</a:t>
@@ -1444,11 +1586,6 @@
         </p:txBody>
       </p:sp>
     </p:spTree>
-    <p:extLst>
-      <p:ext uri="{BB962C8B-B14F-4D97-AF65-F5344CB8AC3E}">
-        <p14:creationId xmlns:p14="http://schemas.microsoft.com/office/powerpoint/2010/main" val="3168075583"/>
-      </p:ext>
-    </p:extLst>
   </p:cSld>
   <p:clrMapOvr>
     <a:masterClrMapping/>
@@ -1457,11 +1594,11 @@
 </file>
 
 <file path=ppt/slideLayouts/slideLayout10.xml><?xml version="1.0" encoding="utf-8"?>
-<p:sldLayout xmlns:a="http://schemas.openxmlformats.org/drawingml/2006/main" xmlns:r="http://schemas.openxmlformats.org/officeDocument/2006/relationships" xmlns:p="http://schemas.openxmlformats.org/presentationml/2006/main" type="vertTx" preserve="1">
+<p:sldLayout xmlns:p="http://schemas.openxmlformats.org/presentationml/2006/main" xmlns:a="http://schemas.openxmlformats.org/drawingml/2006/main" type="vertTx">
   <p:cSld name="Title and Vertical Text">
     <p:spTree>
       <p:nvGrpSpPr>
-        <p:cNvPr id="1" name=""/>
+        <p:cNvPr id="64" name=""/>
         <p:cNvGrpSpPr/>
         <p:nvPr/>
       </p:nvGrpSpPr>
@@ -1475,7 +1612,7 @@
       </p:grpSpPr>
       <p:sp>
         <p:nvSpPr>
-          <p:cNvPr id="2" name="Title 1"/>
+          <p:cNvPr id="65" name="Title 1"/>
           <p:cNvSpPr>
             <a:spLocks noGrp="1"/>
           </p:cNvSpPr>
@@ -1488,6 +1625,7 @@
           <a:bodyPr/>
           <a:lstStyle/>
           <a:p>
+            <a:pPr/>
             <a:r>
               <a:rPr lang="en-US" smtClean="0"/>
               <a:t>Click to edit Master title style</a:t>
@@ -1498,7 +1636,7 @@
       </p:sp>
       <p:sp>
         <p:nvSpPr>
-          <p:cNvPr id="3" name="Vertical Text Placeholder 2"/>
+          <p:cNvPr id="66" name="Vertical Text Placeholder 2"/>
           <p:cNvSpPr>
             <a:spLocks noGrp="1"/>
           </p:cNvSpPr>
@@ -1516,6 +1654,7 @@
               <a:rPr lang="en-US" smtClean="0"/>
               <a:t>Click to edit Master text styles</a:t>
             </a:r>
+            <a:endParaRPr/>
           </a:p>
           <a:p>
             <a:pPr lvl="1"/>
@@ -1523,6 +1662,7 @@
               <a:rPr lang="en-US" smtClean="0"/>
               <a:t>Second level</a:t>
             </a:r>
+            <a:endParaRPr/>
           </a:p>
           <a:p>
             <a:pPr lvl="2"/>
@@ -1530,6 +1670,7 @@
               <a:rPr lang="en-US" smtClean="0"/>
               <a:t>Third level</a:t>
             </a:r>
+            <a:endParaRPr/>
           </a:p>
           <a:p>
             <a:pPr lvl="3"/>
@@ -1537,6 +1678,7 @@
               <a:rPr lang="en-US" smtClean="0"/>
               <a:t>Fourth level</a:t>
             </a:r>
+            <a:endParaRPr/>
           </a:p>
           <a:p>
             <a:pPr lvl="4"/>
@@ -1550,7 +1692,7 @@
       </p:sp>
       <p:sp>
         <p:nvSpPr>
-          <p:cNvPr id="4" name="Date Placeholder 3"/>
+          <p:cNvPr id="67" name="Date Placeholder 3"/>
           <p:cNvSpPr>
             <a:spLocks noGrp="1"/>
           </p:cNvSpPr>
@@ -1563,6 +1705,7 @@
           <a:bodyPr/>
           <a:lstStyle/>
           <a:p>
+            <a:pPr/>
             <a:fld id="{5BCAD085-E8A6-8845-BD4E-CB4CCA059FC4}" type="datetimeFigureOut">
               <a:rPr lang="en-US" smtClean="0"/>
               <a:t>1/27/13</a:t>
@@ -1573,7 +1716,7 @@
       </p:sp>
       <p:sp>
         <p:nvSpPr>
-          <p:cNvPr id="5" name="Footer Placeholder 4"/>
+          <p:cNvPr id="68" name="Footer Placeholder 4"/>
           <p:cNvSpPr>
             <a:spLocks noGrp="1"/>
           </p:cNvSpPr>
@@ -1586,13 +1729,14 @@
           <a:bodyPr/>
           <a:lstStyle/>
           <a:p>
+            <a:pPr/>
             <a:endParaRPr lang="en-US"/>
           </a:p>
         </p:txBody>
       </p:sp>
       <p:sp>
         <p:nvSpPr>
-          <p:cNvPr id="6" name="Slide Number Placeholder 5"/>
+          <p:cNvPr id="69" name="Slide Number Placeholder 5"/>
           <p:cNvSpPr>
             <a:spLocks noGrp="1"/>
           </p:cNvSpPr>
@@ -1605,6 +1749,7 @@
           <a:bodyPr/>
           <a:lstStyle/>
           <a:p>
+            <a:pPr/>
             <a:fld id="{C1FF6DA9-008F-8B48-92A6-B652298478BF}" type="slidenum">
               <a:rPr lang="en-US" smtClean="0"/>
               <a:t>‹#›</a:t>
@@ -1614,11 +1759,6 @@
         </p:txBody>
       </p:sp>
     </p:spTree>
-    <p:extLst>
-      <p:ext uri="{BB962C8B-B14F-4D97-AF65-F5344CB8AC3E}">
-        <p14:creationId xmlns:p14="http://schemas.microsoft.com/office/powerpoint/2010/main" val="2910927964"/>
-      </p:ext>
-    </p:extLst>
   </p:cSld>
   <p:clrMapOvr>
     <a:masterClrMapping/>
@@ -1627,11 +1767,11 @@
 </file>
 
 <file path=ppt/slideLayouts/slideLayout11.xml><?xml version="1.0" encoding="utf-8"?>
-<p:sldLayout xmlns:a="http://schemas.openxmlformats.org/drawingml/2006/main" xmlns:r="http://schemas.openxmlformats.org/officeDocument/2006/relationships" xmlns:p="http://schemas.openxmlformats.org/presentationml/2006/main" type="vertTitleAndTx" preserve="1">
+<p:sldLayout xmlns:p="http://schemas.openxmlformats.org/presentationml/2006/main" xmlns:a="http://schemas.openxmlformats.org/drawingml/2006/main" type="vertTitleAndTx">
   <p:cSld name="Vertical Title and Text">
     <p:spTree>
       <p:nvGrpSpPr>
-        <p:cNvPr id="1" name=""/>
+        <p:cNvPr id="13" name=""/>
         <p:cNvGrpSpPr/>
         <p:nvPr/>
       </p:nvGrpSpPr>
@@ -1645,7 +1785,7 @@
       </p:grpSpPr>
       <p:sp>
         <p:nvSpPr>
-          <p:cNvPr id="2" name="Vertical Title 1"/>
+          <p:cNvPr id="14" name="Vertical Title 1"/>
           <p:cNvSpPr>
             <a:spLocks noGrp="1"/>
           </p:cNvSpPr>
@@ -1663,6 +1803,7 @@
           <a:bodyPr vert="eaVert"/>
           <a:lstStyle/>
           <a:p>
+            <a:pPr/>
             <a:r>
               <a:rPr lang="en-US" smtClean="0"/>
               <a:t>Click to edit Master title style</a:t>
@@ -1673,7 +1814,7 @@
       </p:sp>
       <p:sp>
         <p:nvSpPr>
-          <p:cNvPr id="3" name="Vertical Text Placeholder 2"/>
+          <p:cNvPr id="15" name="Vertical Text Placeholder 2"/>
           <p:cNvSpPr>
             <a:spLocks noGrp="1"/>
           </p:cNvSpPr>
@@ -1696,6 +1837,7 @@
               <a:rPr lang="en-US" smtClean="0"/>
               <a:t>Click to edit Master text styles</a:t>
             </a:r>
+            <a:endParaRPr/>
           </a:p>
           <a:p>
             <a:pPr lvl="1"/>
@@ -1703,6 +1845,7 @@
               <a:rPr lang="en-US" smtClean="0"/>
               <a:t>Second level</a:t>
             </a:r>
+            <a:endParaRPr/>
           </a:p>
           <a:p>
             <a:pPr lvl="2"/>
@@ -1710,6 +1853,7 @@
               <a:rPr lang="en-US" smtClean="0"/>
               <a:t>Third level</a:t>
             </a:r>
+            <a:endParaRPr/>
           </a:p>
           <a:p>
             <a:pPr lvl="3"/>
@@ -1717,6 +1861,7 @@
               <a:rPr lang="en-US" smtClean="0"/>
               <a:t>Fourth level</a:t>
             </a:r>
+            <a:endParaRPr/>
           </a:p>
           <a:p>
             <a:pPr lvl="4"/>
@@ -1730,7 +1875,7 @@
       </p:sp>
       <p:sp>
         <p:nvSpPr>
-          <p:cNvPr id="4" name="Date Placeholder 3"/>
+          <p:cNvPr id="16" name="Date Placeholder 3"/>
           <p:cNvSpPr>
             <a:spLocks noGrp="1"/>
           </p:cNvSpPr>
@@ -1743,6 +1888,7 @@
           <a:bodyPr/>
           <a:lstStyle/>
           <a:p>
+            <a:pPr/>
             <a:fld id="{5BCAD085-E8A6-8845-BD4E-CB4CCA059FC4}" type="datetimeFigureOut">
               <a:rPr lang="en-US" smtClean="0"/>
               <a:t>1/27/13</a:t>
@@ -1753,7 +1899,7 @@
       </p:sp>
       <p:sp>
         <p:nvSpPr>
-          <p:cNvPr id="5" name="Footer Placeholder 4"/>
+          <p:cNvPr id="17" name="Footer Placeholder 4"/>
           <p:cNvSpPr>
             <a:spLocks noGrp="1"/>
           </p:cNvSpPr>
@@ -1766,13 +1912,14 @@
           <a:bodyPr/>
           <a:lstStyle/>
           <a:p>
+            <a:pPr/>
             <a:endParaRPr lang="en-US"/>
           </a:p>
         </p:txBody>
       </p:sp>
       <p:sp>
         <p:nvSpPr>
-          <p:cNvPr id="6" name="Slide Number Placeholder 5"/>
+          <p:cNvPr id="18" name="Slide Number Placeholder 5"/>
           <p:cNvSpPr>
             <a:spLocks noGrp="1"/>
           </p:cNvSpPr>
@@ -1785,6 +1932,7 @@
           <a:bodyPr/>
           <a:lstStyle/>
           <a:p>
+            <a:pPr/>
             <a:fld id="{C1FF6DA9-008F-8B48-92A6-B652298478BF}" type="slidenum">
               <a:rPr lang="en-US" smtClean="0"/>
               <a:t>‹#›</a:t>
@@ -1794,11 +1942,6 @@
         </p:txBody>
       </p:sp>
     </p:spTree>
-    <p:extLst>
-      <p:ext uri="{BB962C8B-B14F-4D97-AF65-F5344CB8AC3E}">
-        <p14:creationId xmlns:p14="http://schemas.microsoft.com/office/powerpoint/2010/main" val="3612223792"/>
-      </p:ext>
-    </p:extLst>
   </p:cSld>
   <p:clrMapOvr>
     <a:masterClrMapping/>
@@ -1807,11 +1950,11 @@
 </file>
 
 <file path=ppt/slideLayouts/slideLayout2.xml><?xml version="1.0" encoding="utf-8"?>
-<p:sldLayout xmlns:a="http://schemas.openxmlformats.org/drawingml/2006/main" xmlns:r="http://schemas.openxmlformats.org/officeDocument/2006/relationships" xmlns:p="http://schemas.openxmlformats.org/presentationml/2006/main" type="obj" preserve="1">
+<p:sldLayout xmlns:p="http://schemas.openxmlformats.org/presentationml/2006/main" xmlns:a="http://schemas.openxmlformats.org/drawingml/2006/main" type="obj">
   <p:cSld name="Title and Content">
     <p:spTree>
       <p:nvGrpSpPr>
-        <p:cNvPr id="1" name=""/>
+        <p:cNvPr id="7" name=""/>
         <p:cNvGrpSpPr/>
         <p:nvPr/>
       </p:nvGrpSpPr>
@@ -1825,7 +1968,7 @@
       </p:grpSpPr>
       <p:sp>
         <p:nvSpPr>
-          <p:cNvPr id="2" name="Title 1"/>
+          <p:cNvPr id="8" name="Title 1"/>
           <p:cNvSpPr>
             <a:spLocks noGrp="1"/>
           </p:cNvSpPr>
@@ -1838,6 +1981,7 @@
           <a:bodyPr/>
           <a:lstStyle/>
           <a:p>
+            <a:pPr/>
             <a:r>
               <a:rPr lang="en-US" smtClean="0"/>
               <a:t>Click to edit Master title style</a:t>
@@ -1848,7 +1992,7 @@
       </p:sp>
       <p:sp>
         <p:nvSpPr>
-          <p:cNvPr id="3" name="Content Placeholder 2"/>
+          <p:cNvPr id="9" name="Content Placeholder 2"/>
           <p:cNvSpPr>
             <a:spLocks noGrp="1"/>
           </p:cNvSpPr>
@@ -1866,6 +2010,7 @@
               <a:rPr lang="en-US" smtClean="0"/>
               <a:t>Click to edit Master text styles</a:t>
             </a:r>
+            <a:endParaRPr/>
           </a:p>
           <a:p>
             <a:pPr lvl="1"/>
@@ -1873,6 +2018,7 @@
               <a:rPr lang="en-US" smtClean="0"/>
               <a:t>Second level</a:t>
             </a:r>
+            <a:endParaRPr/>
           </a:p>
           <a:p>
             <a:pPr lvl="2"/>
@@ -1880,6 +2026,7 @@
               <a:rPr lang="en-US" smtClean="0"/>
               <a:t>Third level</a:t>
             </a:r>
+            <a:endParaRPr/>
           </a:p>
           <a:p>
             <a:pPr lvl="3"/>
@@ -1887,6 +2034,7 @@
               <a:rPr lang="en-US" smtClean="0"/>
               <a:t>Fourth level</a:t>
             </a:r>
+            <a:endParaRPr/>
           </a:p>
           <a:p>
             <a:pPr lvl="4"/>
@@ -1900,7 +2048,7 @@
       </p:sp>
       <p:sp>
         <p:nvSpPr>
-          <p:cNvPr id="4" name="Date Placeholder 3"/>
+          <p:cNvPr id="10" name="Date Placeholder 3"/>
           <p:cNvSpPr>
             <a:spLocks noGrp="1"/>
           </p:cNvSpPr>
@@ -1913,6 +2061,7 @@
           <a:bodyPr/>
           <a:lstStyle/>
           <a:p>
+            <a:pPr/>
             <a:fld id="{5BCAD085-E8A6-8845-BD4E-CB4CCA059FC4}" type="datetimeFigureOut">
               <a:rPr lang="en-US" smtClean="0"/>
               <a:t>1/27/13</a:t>
@@ -1923,7 +2072,7 @@
       </p:sp>
       <p:sp>
         <p:nvSpPr>
-          <p:cNvPr id="5" name="Footer Placeholder 4"/>
+          <p:cNvPr id="11" name="Footer Placeholder 4"/>
           <p:cNvSpPr>
             <a:spLocks noGrp="1"/>
           </p:cNvSpPr>
@@ -1936,13 +2085,14 @@
           <a:bodyPr/>
           <a:lstStyle/>
           <a:p>
+            <a:pPr/>
             <a:endParaRPr lang="en-US"/>
           </a:p>
         </p:txBody>
       </p:sp>
       <p:sp>
         <p:nvSpPr>
-          <p:cNvPr id="6" name="Slide Number Placeholder 5"/>
+          <p:cNvPr id="12" name="Slide Number Placeholder 5"/>
           <p:cNvSpPr>
             <a:spLocks noGrp="1"/>
           </p:cNvSpPr>
@@ -1955,6 +2105,7 @@
           <a:bodyPr/>
           <a:lstStyle/>
           <a:p>
+            <a:pPr/>
             <a:fld id="{C1FF6DA9-008F-8B48-92A6-B652298478BF}" type="slidenum">
               <a:rPr lang="en-US" smtClean="0"/>
               <a:t>‹#›</a:t>
@@ -1964,11 +2115,6 @@
         </p:txBody>
       </p:sp>
     </p:spTree>
-    <p:extLst>
-      <p:ext uri="{BB962C8B-B14F-4D97-AF65-F5344CB8AC3E}">
-        <p14:creationId xmlns:p14="http://schemas.microsoft.com/office/powerpoint/2010/main" val="2614314258"/>
-      </p:ext>
-    </p:extLst>
   </p:cSld>
   <p:clrMapOvr>
     <a:masterClrMapping/>
@@ -1977,11 +2123,11 @@
 </file>
 
 <file path=ppt/slideLayouts/slideLayout3.xml><?xml version="1.0" encoding="utf-8"?>
-<p:sldLayout xmlns:a="http://schemas.openxmlformats.org/drawingml/2006/main" xmlns:r="http://schemas.openxmlformats.org/officeDocument/2006/relationships" xmlns:p="http://schemas.openxmlformats.org/presentationml/2006/main" type="secHead" preserve="1">
+<p:sldLayout xmlns:p="http://schemas.openxmlformats.org/presentationml/2006/main" xmlns:a="http://schemas.openxmlformats.org/drawingml/2006/main" type="secHead">
   <p:cSld name="Section Header">
     <p:spTree>
       <p:nvGrpSpPr>
-        <p:cNvPr id="1" name=""/>
+        <p:cNvPr id="19" name=""/>
         <p:cNvGrpSpPr/>
         <p:nvPr/>
       </p:nvGrpSpPr>
@@ -1995,7 +2141,7 @@
       </p:grpSpPr>
       <p:sp>
         <p:nvSpPr>
-          <p:cNvPr id="2" name="Title 1"/>
+          <p:cNvPr id="20" name="Title 1"/>
           <p:cNvSpPr>
             <a:spLocks noGrp="1"/>
           </p:cNvSpPr>
@@ -2017,6 +2163,7 @@
             </a:lvl1pPr>
           </a:lstStyle>
           <a:p>
+            <a:pPr/>
             <a:r>
               <a:rPr lang="en-US" smtClean="0"/>
               <a:t>Click to edit Master title style</a:t>
@@ -2027,7 +2174,7 @@
       </p:sp>
       <p:sp>
         <p:nvSpPr>
-          <p:cNvPr id="3" name="Text Placeholder 2"/>
+          <p:cNvPr id="21" name="Text Placeholder 2"/>
           <p:cNvSpPr>
             <a:spLocks noGrp="1"/>
           </p:cNvSpPr>
@@ -2141,12 +2288,13 @@
               <a:rPr lang="en-US" smtClean="0"/>
               <a:t>Click to edit Master text styles</a:t>
             </a:r>
-          </a:p>
-        </p:txBody>
-      </p:sp>
-      <p:sp>
-        <p:nvSpPr>
-          <p:cNvPr id="4" name="Date Placeholder 3"/>
+            <a:endParaRPr/>
+          </a:p>
+        </p:txBody>
+      </p:sp>
+      <p:sp>
+        <p:nvSpPr>
+          <p:cNvPr id="22" name="Date Placeholder 3"/>
           <p:cNvSpPr>
             <a:spLocks noGrp="1"/>
           </p:cNvSpPr>
@@ -2159,6 +2307,7 @@
           <a:bodyPr/>
           <a:lstStyle/>
           <a:p>
+            <a:pPr/>
             <a:fld id="{5BCAD085-E8A6-8845-BD4E-CB4CCA059FC4}" type="datetimeFigureOut">
               <a:rPr lang="en-US" smtClean="0"/>
               <a:t>1/27/13</a:t>
@@ -2169,7 +2318,7 @@
       </p:sp>
       <p:sp>
         <p:nvSpPr>
-          <p:cNvPr id="5" name="Footer Placeholder 4"/>
+          <p:cNvPr id="23" name="Footer Placeholder 4"/>
           <p:cNvSpPr>
             <a:spLocks noGrp="1"/>
           </p:cNvSpPr>
@@ -2182,13 +2331,14 @@
           <a:bodyPr/>
           <a:lstStyle/>
           <a:p>
+            <a:pPr/>
             <a:endParaRPr lang="en-US"/>
           </a:p>
         </p:txBody>
       </p:sp>
       <p:sp>
         <p:nvSpPr>
-          <p:cNvPr id="6" name="Slide Number Placeholder 5"/>
+          <p:cNvPr id="24" name="Slide Number Placeholder 5"/>
           <p:cNvSpPr>
             <a:spLocks noGrp="1"/>
           </p:cNvSpPr>
@@ -2201,6 +2351,7 @@
           <a:bodyPr/>
           <a:lstStyle/>
           <a:p>
+            <a:pPr/>
             <a:fld id="{C1FF6DA9-008F-8B48-92A6-B652298478BF}" type="slidenum">
               <a:rPr lang="en-US" smtClean="0"/>
               <a:t>‹#›</a:t>
@@ -2210,11 +2361,6 @@
         </p:txBody>
       </p:sp>
     </p:spTree>
-    <p:extLst>
-      <p:ext uri="{BB962C8B-B14F-4D97-AF65-F5344CB8AC3E}">
-        <p14:creationId xmlns:p14="http://schemas.microsoft.com/office/powerpoint/2010/main" val="960648375"/>
-      </p:ext>
-    </p:extLst>
   </p:cSld>
   <p:clrMapOvr>
     <a:masterClrMapping/>
@@ -2223,11 +2369,11 @@
 </file>
 
 <file path=ppt/slideLayouts/slideLayout4.xml><?xml version="1.0" encoding="utf-8"?>
-<p:sldLayout xmlns:a="http://schemas.openxmlformats.org/drawingml/2006/main" xmlns:r="http://schemas.openxmlformats.org/officeDocument/2006/relationships" xmlns:p="http://schemas.openxmlformats.org/presentationml/2006/main" type="twoObj" preserve="1">
+<p:sldLayout xmlns:p="http://schemas.openxmlformats.org/presentationml/2006/main" xmlns:a="http://schemas.openxmlformats.org/drawingml/2006/main" type="twoObj">
   <p:cSld name="Two Content">
     <p:spTree>
       <p:nvGrpSpPr>
-        <p:cNvPr id="1" name=""/>
+        <p:cNvPr id="25" name=""/>
         <p:cNvGrpSpPr/>
         <p:nvPr/>
       </p:nvGrpSpPr>
@@ -2241,7 +2387,7 @@
       </p:grpSpPr>
       <p:sp>
         <p:nvSpPr>
-          <p:cNvPr id="2" name="Title 1"/>
+          <p:cNvPr id="26" name="Title 1"/>
           <p:cNvSpPr>
             <a:spLocks noGrp="1"/>
           </p:cNvSpPr>
@@ -2254,6 +2400,7 @@
           <a:bodyPr/>
           <a:lstStyle/>
           <a:p>
+            <a:pPr/>
             <a:r>
               <a:rPr lang="en-US" smtClean="0"/>
               <a:t>Click to edit Master title style</a:t>
@@ -2264,7 +2411,7 @@
       </p:sp>
       <p:sp>
         <p:nvSpPr>
-          <p:cNvPr id="3" name="Content Placeholder 2"/>
+          <p:cNvPr id="27" name="Content Placeholder 2"/>
           <p:cNvSpPr>
             <a:spLocks noGrp="1"/>
           </p:cNvSpPr>
@@ -2315,6 +2462,7 @@
               <a:rPr lang="en-US" smtClean="0"/>
               <a:t>Click to edit Master text styles</a:t>
             </a:r>
+            <a:endParaRPr/>
           </a:p>
           <a:p>
             <a:pPr lvl="1"/>
@@ -2322,6 +2470,7 @@
               <a:rPr lang="en-US" smtClean="0"/>
               <a:t>Second level</a:t>
             </a:r>
+            <a:endParaRPr/>
           </a:p>
           <a:p>
             <a:pPr lvl="2"/>
@@ -2329,6 +2478,7 @@
               <a:rPr lang="en-US" smtClean="0"/>
               <a:t>Third level</a:t>
             </a:r>
+            <a:endParaRPr/>
           </a:p>
           <a:p>
             <a:pPr lvl="3"/>
@@ -2336,6 +2486,7 @@
               <a:rPr lang="en-US" smtClean="0"/>
               <a:t>Fourth level</a:t>
             </a:r>
+            <a:endParaRPr/>
           </a:p>
           <a:p>
             <a:pPr lvl="4"/>
@@ -2349,7 +2500,7 @@
       </p:sp>
       <p:sp>
         <p:nvSpPr>
-          <p:cNvPr id="4" name="Content Placeholder 3"/>
+          <p:cNvPr id="28" name="Content Placeholder 3"/>
           <p:cNvSpPr>
             <a:spLocks noGrp="1"/>
           </p:cNvSpPr>
@@ -2400,6 +2551,7 @@
               <a:rPr lang="en-US" smtClean="0"/>
               <a:t>Click to edit Master text styles</a:t>
             </a:r>
+            <a:endParaRPr/>
           </a:p>
           <a:p>
             <a:pPr lvl="1"/>
@@ -2407,6 +2559,7 @@
               <a:rPr lang="en-US" smtClean="0"/>
               <a:t>Second level</a:t>
             </a:r>
+            <a:endParaRPr/>
           </a:p>
           <a:p>
             <a:pPr lvl="2"/>
@@ -2414,6 +2567,7 @@
               <a:rPr lang="en-US" smtClean="0"/>
               <a:t>Third level</a:t>
             </a:r>
+            <a:endParaRPr/>
           </a:p>
           <a:p>
             <a:pPr lvl="3"/>
@@ -2421,6 +2575,7 @@
               <a:rPr lang="en-US" smtClean="0"/>
               <a:t>Fourth level</a:t>
             </a:r>
+            <a:endParaRPr/>
           </a:p>
           <a:p>
             <a:pPr lvl="4"/>
@@ -2434,7 +2589,7 @@
       </p:sp>
       <p:sp>
         <p:nvSpPr>
-          <p:cNvPr id="5" name="Date Placeholder 4"/>
+          <p:cNvPr id="29" name="Date Placeholder 4"/>
           <p:cNvSpPr>
             <a:spLocks noGrp="1"/>
           </p:cNvSpPr>
@@ -2447,6 +2602,7 @@
           <a:bodyPr/>
           <a:lstStyle/>
           <a:p>
+            <a:pPr/>
             <a:fld id="{5BCAD085-E8A6-8845-BD4E-CB4CCA059FC4}" type="datetimeFigureOut">
               <a:rPr lang="en-US" smtClean="0"/>
               <a:t>1/27/13</a:t>
@@ -2457,7 +2613,7 @@
       </p:sp>
       <p:sp>
         <p:nvSpPr>
-          <p:cNvPr id="6" name="Footer Placeholder 5"/>
+          <p:cNvPr id="30" name="Footer Placeholder 5"/>
           <p:cNvSpPr>
             <a:spLocks noGrp="1"/>
           </p:cNvSpPr>
@@ -2470,13 +2626,14 @@
           <a:bodyPr/>
           <a:lstStyle/>
           <a:p>
+            <a:pPr/>
             <a:endParaRPr lang="en-US"/>
           </a:p>
         </p:txBody>
       </p:sp>
       <p:sp>
         <p:nvSpPr>
-          <p:cNvPr id="7" name="Slide Number Placeholder 6"/>
+          <p:cNvPr id="31" name="Slide Number Placeholder 6"/>
           <p:cNvSpPr>
             <a:spLocks noGrp="1"/>
           </p:cNvSpPr>
@@ -2489,6 +2646,7 @@
           <a:bodyPr/>
           <a:lstStyle/>
           <a:p>
+            <a:pPr/>
             <a:fld id="{C1FF6DA9-008F-8B48-92A6-B652298478BF}" type="slidenum">
               <a:rPr lang="en-US" smtClean="0"/>
               <a:t>‹#›</a:t>
@@ -2498,11 +2656,6 @@
         </p:txBody>
       </p:sp>
     </p:spTree>
-    <p:extLst>
-      <p:ext uri="{BB962C8B-B14F-4D97-AF65-F5344CB8AC3E}">
-        <p14:creationId xmlns:p14="http://schemas.microsoft.com/office/powerpoint/2010/main" val="2782244947"/>
-      </p:ext>
-    </p:extLst>
   </p:cSld>
   <p:clrMapOvr>
     <a:masterClrMapping/>
@@ -2511,11 +2664,11 @@
 </file>
 
 <file path=ppt/slideLayouts/slideLayout5.xml><?xml version="1.0" encoding="utf-8"?>
-<p:sldLayout xmlns:a="http://schemas.openxmlformats.org/drawingml/2006/main" xmlns:r="http://schemas.openxmlformats.org/officeDocument/2006/relationships" xmlns:p="http://schemas.openxmlformats.org/presentationml/2006/main" type="twoTxTwoObj" preserve="1">
+<p:sldLayout xmlns:p="http://schemas.openxmlformats.org/presentationml/2006/main" xmlns:a="http://schemas.openxmlformats.org/drawingml/2006/main" type="twoTxTwoObj">
   <p:cSld name="Comparison">
     <p:spTree>
       <p:nvGrpSpPr>
-        <p:cNvPr id="1" name=""/>
+        <p:cNvPr id="32" name=""/>
         <p:cNvGrpSpPr/>
         <p:nvPr/>
       </p:nvGrpSpPr>
@@ -2529,7 +2682,7 @@
       </p:grpSpPr>
       <p:sp>
         <p:nvSpPr>
-          <p:cNvPr id="2" name="Title 1"/>
+          <p:cNvPr id="33" name="Title 1"/>
           <p:cNvSpPr>
             <a:spLocks noGrp="1"/>
           </p:cNvSpPr>
@@ -2546,6 +2699,7 @@
             </a:lvl1pPr>
           </a:lstStyle>
           <a:p>
+            <a:pPr/>
             <a:r>
               <a:rPr lang="en-US" smtClean="0"/>
               <a:t>Click to edit Master title style</a:t>
@@ -2556,7 +2710,7 @@
       </p:sp>
       <p:sp>
         <p:nvSpPr>
-          <p:cNvPr id="3" name="Text Placeholder 2"/>
+          <p:cNvPr id="34" name="Text Placeholder 2"/>
           <p:cNvSpPr>
             <a:spLocks noGrp="1"/>
           </p:cNvSpPr>
@@ -2616,12 +2770,13 @@
               <a:rPr lang="en-US" smtClean="0"/>
               <a:t>Click to edit Master text styles</a:t>
             </a:r>
-          </a:p>
-        </p:txBody>
-      </p:sp>
-      <p:sp>
-        <p:nvSpPr>
-          <p:cNvPr id="4" name="Content Placeholder 3"/>
+            <a:endParaRPr/>
+          </a:p>
+        </p:txBody>
+      </p:sp>
+      <p:sp>
+        <p:nvSpPr>
+          <p:cNvPr id="35" name="Content Placeholder 3"/>
           <p:cNvSpPr>
             <a:spLocks noGrp="1"/>
           </p:cNvSpPr>
@@ -2672,6 +2827,7 @@
               <a:rPr lang="en-US" smtClean="0"/>
               <a:t>Click to edit Master text styles</a:t>
             </a:r>
+            <a:endParaRPr/>
           </a:p>
           <a:p>
             <a:pPr lvl="1"/>
@@ -2679,6 +2835,7 @@
               <a:rPr lang="en-US" smtClean="0"/>
               <a:t>Second level</a:t>
             </a:r>
+            <a:endParaRPr/>
           </a:p>
           <a:p>
             <a:pPr lvl="2"/>
@@ -2686,6 +2843,7 @@
               <a:rPr lang="en-US" smtClean="0"/>
               <a:t>Third level</a:t>
             </a:r>
+            <a:endParaRPr/>
           </a:p>
           <a:p>
             <a:pPr lvl="3"/>
@@ -2693,6 +2851,7 @@
               <a:rPr lang="en-US" smtClean="0"/>
               <a:t>Fourth level</a:t>
             </a:r>
+            <a:endParaRPr/>
           </a:p>
           <a:p>
             <a:pPr lvl="4"/>
@@ -2706,7 +2865,7 @@
       </p:sp>
       <p:sp>
         <p:nvSpPr>
-          <p:cNvPr id="5" name="Text Placeholder 4"/>
+          <p:cNvPr id="36" name="Text Placeholder 4"/>
           <p:cNvSpPr>
             <a:spLocks noGrp="1"/>
           </p:cNvSpPr>
@@ -2766,12 +2925,13 @@
               <a:rPr lang="en-US" smtClean="0"/>
               <a:t>Click to edit Master text styles</a:t>
             </a:r>
-          </a:p>
-        </p:txBody>
-      </p:sp>
-      <p:sp>
-        <p:nvSpPr>
-          <p:cNvPr id="6" name="Content Placeholder 5"/>
+            <a:endParaRPr/>
+          </a:p>
+        </p:txBody>
+      </p:sp>
+      <p:sp>
+        <p:nvSpPr>
+          <p:cNvPr id="37" name="Content Placeholder 5"/>
           <p:cNvSpPr>
             <a:spLocks noGrp="1"/>
           </p:cNvSpPr>
@@ -2822,6 +2982,7 @@
               <a:rPr lang="en-US" smtClean="0"/>
               <a:t>Click to edit Master text styles</a:t>
             </a:r>
+            <a:endParaRPr/>
           </a:p>
           <a:p>
             <a:pPr lvl="1"/>
@@ -2829,6 +2990,7 @@
               <a:rPr lang="en-US" smtClean="0"/>
               <a:t>Second level</a:t>
             </a:r>
+            <a:endParaRPr/>
           </a:p>
           <a:p>
             <a:pPr lvl="2"/>
@@ -2836,6 +2998,7 @@
               <a:rPr lang="en-US" smtClean="0"/>
               <a:t>Third level</a:t>
             </a:r>
+            <a:endParaRPr/>
           </a:p>
           <a:p>
             <a:pPr lvl="3"/>
@@ -2843,6 +3006,7 @@
               <a:rPr lang="en-US" smtClean="0"/>
               <a:t>Fourth level</a:t>
             </a:r>
+            <a:endParaRPr/>
           </a:p>
           <a:p>
             <a:pPr lvl="4"/>
@@ -2856,7 +3020,7 @@
       </p:sp>
       <p:sp>
         <p:nvSpPr>
-          <p:cNvPr id="7" name="Date Placeholder 6"/>
+          <p:cNvPr id="38" name="Date Placeholder 6"/>
           <p:cNvSpPr>
             <a:spLocks noGrp="1"/>
           </p:cNvSpPr>
@@ -2869,6 +3033,7 @@
           <a:bodyPr/>
           <a:lstStyle/>
           <a:p>
+            <a:pPr/>
             <a:fld id="{5BCAD085-E8A6-8845-BD4E-CB4CCA059FC4}" type="datetimeFigureOut">
               <a:rPr lang="en-US" smtClean="0"/>
               <a:t>1/27/13</a:t>
@@ -2879,7 +3044,7 @@
       </p:sp>
       <p:sp>
         <p:nvSpPr>
-          <p:cNvPr id="8" name="Footer Placeholder 7"/>
+          <p:cNvPr id="39" name="Footer Placeholder 7"/>
           <p:cNvSpPr>
             <a:spLocks noGrp="1"/>
           </p:cNvSpPr>
@@ -2892,13 +3057,14 @@
           <a:bodyPr/>
           <a:lstStyle/>
           <a:p>
+            <a:pPr/>
             <a:endParaRPr lang="en-US"/>
           </a:p>
         </p:txBody>
       </p:sp>
       <p:sp>
         <p:nvSpPr>
-          <p:cNvPr id="9" name="Slide Number Placeholder 8"/>
+          <p:cNvPr id="40" name="Slide Number Placeholder 8"/>
           <p:cNvSpPr>
             <a:spLocks noGrp="1"/>
           </p:cNvSpPr>
@@ -2911,6 +3077,7 @@
           <a:bodyPr/>
           <a:lstStyle/>
           <a:p>
+            <a:pPr/>
             <a:fld id="{C1FF6DA9-008F-8B48-92A6-B652298478BF}" type="slidenum">
               <a:rPr lang="en-US" smtClean="0"/>
               <a:t>‹#›</a:t>
@@ -2920,11 +3087,6 @@
         </p:txBody>
       </p:sp>
     </p:spTree>
-    <p:extLst>
-      <p:ext uri="{BB962C8B-B14F-4D97-AF65-F5344CB8AC3E}">
-        <p14:creationId xmlns:p14="http://schemas.microsoft.com/office/powerpoint/2010/main" val="990158736"/>
-      </p:ext>
-    </p:extLst>
   </p:cSld>
   <p:clrMapOvr>
     <a:masterClrMapping/>
@@ -2933,11 +3095,11 @@
 </file>
 
 <file path=ppt/slideLayouts/slideLayout6.xml><?xml version="1.0" encoding="utf-8"?>
-<p:sldLayout xmlns:a="http://schemas.openxmlformats.org/drawingml/2006/main" xmlns:r="http://schemas.openxmlformats.org/officeDocument/2006/relationships" xmlns:p="http://schemas.openxmlformats.org/presentationml/2006/main" type="titleOnly" preserve="1">
+<p:sldLayout xmlns:p="http://schemas.openxmlformats.org/presentationml/2006/main" xmlns:a="http://schemas.openxmlformats.org/drawingml/2006/main" type="titleOnly">
   <p:cSld name="Title Only">
     <p:spTree>
       <p:nvGrpSpPr>
-        <p:cNvPr id="1" name=""/>
+        <p:cNvPr id="41" name=""/>
         <p:cNvGrpSpPr/>
         <p:nvPr/>
       </p:nvGrpSpPr>
@@ -2951,7 +3113,7 @@
       </p:grpSpPr>
       <p:sp>
         <p:nvSpPr>
-          <p:cNvPr id="2" name="Title 1"/>
+          <p:cNvPr id="42" name="Title 1"/>
           <p:cNvSpPr>
             <a:spLocks noGrp="1"/>
           </p:cNvSpPr>
@@ -2964,6 +3126,7 @@
           <a:bodyPr/>
           <a:lstStyle/>
           <a:p>
+            <a:pPr/>
             <a:r>
               <a:rPr lang="en-US" smtClean="0"/>
               <a:t>Click to edit Master title style</a:t>
@@ -2974,7 +3137,7 @@
       </p:sp>
       <p:sp>
         <p:nvSpPr>
-          <p:cNvPr id="3" name="Date Placeholder 2"/>
+          <p:cNvPr id="43" name="Date Placeholder 2"/>
           <p:cNvSpPr>
             <a:spLocks noGrp="1"/>
           </p:cNvSpPr>
@@ -2987,6 +3150,7 @@
           <a:bodyPr/>
           <a:lstStyle/>
           <a:p>
+            <a:pPr/>
             <a:fld id="{5BCAD085-E8A6-8845-BD4E-CB4CCA059FC4}" type="datetimeFigureOut">
               <a:rPr lang="en-US" smtClean="0"/>
               <a:t>1/27/13</a:t>
@@ -2997,7 +3161,7 @@
       </p:sp>
       <p:sp>
         <p:nvSpPr>
-          <p:cNvPr id="4" name="Footer Placeholder 3"/>
+          <p:cNvPr id="44" name="Footer Placeholder 3"/>
           <p:cNvSpPr>
             <a:spLocks noGrp="1"/>
           </p:cNvSpPr>
@@ -3010,13 +3174,14 @@
           <a:bodyPr/>
           <a:lstStyle/>
           <a:p>
+            <a:pPr/>
             <a:endParaRPr lang="en-US"/>
           </a:p>
         </p:txBody>
       </p:sp>
       <p:sp>
         <p:nvSpPr>
-          <p:cNvPr id="5" name="Slide Number Placeholder 4"/>
+          <p:cNvPr id="45" name="Slide Number Placeholder 4"/>
           <p:cNvSpPr>
             <a:spLocks noGrp="1"/>
           </p:cNvSpPr>
@@ -3029,6 +3194,7 @@
           <a:bodyPr/>
           <a:lstStyle/>
           <a:p>
+            <a:pPr/>
             <a:fld id="{C1FF6DA9-008F-8B48-92A6-B652298478BF}" type="slidenum">
               <a:rPr lang="en-US" smtClean="0"/>
               <a:t>‹#›</a:t>
@@ -3038,11 +3204,6 @@
         </p:txBody>
       </p:sp>
     </p:spTree>
-    <p:extLst>
-      <p:ext uri="{BB962C8B-B14F-4D97-AF65-F5344CB8AC3E}">
-        <p14:creationId xmlns:p14="http://schemas.microsoft.com/office/powerpoint/2010/main" val="727027711"/>
-      </p:ext>
-    </p:extLst>
   </p:cSld>
   <p:clrMapOvr>
     <a:masterClrMapping/>
@@ -3051,11 +3212,11 @@
 </file>
 
 <file path=ppt/slideLayouts/slideLayout7.xml><?xml version="1.0" encoding="utf-8"?>
-<p:sldLayout xmlns:a="http://schemas.openxmlformats.org/drawingml/2006/main" xmlns:r="http://schemas.openxmlformats.org/officeDocument/2006/relationships" xmlns:p="http://schemas.openxmlformats.org/presentationml/2006/main" type="blank" preserve="1">
+<p:sldLayout xmlns:p="http://schemas.openxmlformats.org/presentationml/2006/main" xmlns:a="http://schemas.openxmlformats.org/drawingml/2006/main" type="blank">
   <p:cSld name="Blank">
     <p:spTree>
       <p:nvGrpSpPr>
-        <p:cNvPr id="1" name=""/>
+        <p:cNvPr id="46" name=""/>
         <p:cNvGrpSpPr/>
         <p:nvPr/>
       </p:nvGrpSpPr>
@@ -3069,7 +3230,7 @@
       </p:grpSpPr>
       <p:sp>
         <p:nvSpPr>
-          <p:cNvPr id="2" name="Date Placeholder 1"/>
+          <p:cNvPr id="47" name="Date Placeholder 1"/>
           <p:cNvSpPr>
             <a:spLocks noGrp="1"/>
           </p:cNvSpPr>
@@ -3082,6 +3243,7 @@
           <a:bodyPr/>
           <a:lstStyle/>
           <a:p>
+            <a:pPr/>
             <a:fld id="{5BCAD085-E8A6-8845-BD4E-CB4CCA059FC4}" type="datetimeFigureOut">
               <a:rPr lang="en-US" smtClean="0"/>
               <a:t>1/27/13</a:t>
@@ -3092,7 +3254,7 @@
       </p:sp>
       <p:sp>
         <p:nvSpPr>
-          <p:cNvPr id="3" name="Footer Placeholder 2"/>
+          <p:cNvPr id="48" name="Footer Placeholder 2"/>
           <p:cNvSpPr>
             <a:spLocks noGrp="1"/>
           </p:cNvSpPr>
@@ -3105,13 +3267,14 @@
           <a:bodyPr/>
           <a:lstStyle/>
           <a:p>
+            <a:pPr/>
             <a:endParaRPr lang="en-US"/>
           </a:p>
         </p:txBody>
       </p:sp>
       <p:sp>
         <p:nvSpPr>
-          <p:cNvPr id="4" name="Slide Number Placeholder 3"/>
+          <p:cNvPr id="49" name="Slide Number Placeholder 3"/>
           <p:cNvSpPr>
             <a:spLocks noGrp="1"/>
           </p:cNvSpPr>
@@ -3124,6 +3287,7 @@
           <a:bodyPr/>
           <a:lstStyle/>
           <a:p>
+            <a:pPr/>
             <a:fld id="{C1FF6DA9-008F-8B48-92A6-B652298478BF}" type="slidenum">
               <a:rPr lang="en-US" smtClean="0"/>
               <a:t>‹#›</a:t>
@@ -3133,11 +3297,6 @@
         </p:txBody>
       </p:sp>
     </p:spTree>
-    <p:extLst>
-      <p:ext uri="{BB962C8B-B14F-4D97-AF65-F5344CB8AC3E}">
-        <p14:creationId xmlns:p14="http://schemas.microsoft.com/office/powerpoint/2010/main" val="1212999818"/>
-      </p:ext>
-    </p:extLst>
   </p:cSld>
   <p:clrMapOvr>
     <a:masterClrMapping/>
@@ -3146,11 +3305,11 @@
 </file>
 
 <file path=ppt/slideLayouts/slideLayout8.xml><?xml version="1.0" encoding="utf-8"?>
-<p:sldLayout xmlns:a="http://schemas.openxmlformats.org/drawingml/2006/main" xmlns:r="http://schemas.openxmlformats.org/officeDocument/2006/relationships" xmlns:p="http://schemas.openxmlformats.org/presentationml/2006/main" type="objTx" preserve="1">
+<p:sldLayout xmlns:p="http://schemas.openxmlformats.org/presentationml/2006/main" xmlns:a="http://schemas.openxmlformats.org/drawingml/2006/main" type="objTx">
   <p:cSld name="Content with Caption">
     <p:spTree>
       <p:nvGrpSpPr>
-        <p:cNvPr id="1" name=""/>
+        <p:cNvPr id="50" name=""/>
         <p:cNvGrpSpPr/>
         <p:nvPr/>
       </p:nvGrpSpPr>
@@ -3164,7 +3323,7 @@
       </p:grpSpPr>
       <p:sp>
         <p:nvSpPr>
-          <p:cNvPr id="2" name="Title 1"/>
+          <p:cNvPr id="51" name="Title 1"/>
           <p:cNvSpPr>
             <a:spLocks noGrp="1"/>
           </p:cNvSpPr>
@@ -3186,6 +3345,7 @@
             </a:lvl1pPr>
           </a:lstStyle>
           <a:p>
+            <a:pPr/>
             <a:r>
               <a:rPr lang="en-US" smtClean="0"/>
               <a:t>Click to edit Master title style</a:t>
@@ -3196,7 +3356,7 @@
       </p:sp>
       <p:sp>
         <p:nvSpPr>
-          <p:cNvPr id="3" name="Content Placeholder 2"/>
+          <p:cNvPr id="52" name="Content Placeholder 2"/>
           <p:cNvSpPr>
             <a:spLocks noGrp="1"/>
           </p:cNvSpPr>
@@ -3247,6 +3407,7 @@
               <a:rPr lang="en-US" smtClean="0"/>
               <a:t>Click to edit Master text styles</a:t>
             </a:r>
+            <a:endParaRPr/>
           </a:p>
           <a:p>
             <a:pPr lvl="1"/>
@@ -3254,6 +3415,7 @@
               <a:rPr lang="en-US" smtClean="0"/>
               <a:t>Second level</a:t>
             </a:r>
+            <a:endParaRPr/>
           </a:p>
           <a:p>
             <a:pPr lvl="2"/>
@@ -3261,6 +3423,7 @@
               <a:rPr lang="en-US" smtClean="0"/>
               <a:t>Third level</a:t>
             </a:r>
+            <a:endParaRPr/>
           </a:p>
           <a:p>
             <a:pPr lvl="3"/>
@@ -3268,6 +3431,7 @@
               <a:rPr lang="en-US" smtClean="0"/>
               <a:t>Fourth level</a:t>
             </a:r>
+            <a:endParaRPr/>
           </a:p>
           <a:p>
             <a:pPr lvl="4"/>
@@ -3281,7 +3445,7 @@
       </p:sp>
       <p:sp>
         <p:nvSpPr>
-          <p:cNvPr id="4" name="Text Placeholder 3"/>
+          <p:cNvPr id="53" name="Text Placeholder 3"/>
           <p:cNvSpPr>
             <a:spLocks noGrp="1"/>
           </p:cNvSpPr>
@@ -3341,12 +3505,13 @@
               <a:rPr lang="en-US" smtClean="0"/>
               <a:t>Click to edit Master text styles</a:t>
             </a:r>
-          </a:p>
-        </p:txBody>
-      </p:sp>
-      <p:sp>
-        <p:nvSpPr>
-          <p:cNvPr id="5" name="Date Placeholder 4"/>
+            <a:endParaRPr/>
+          </a:p>
+        </p:txBody>
+      </p:sp>
+      <p:sp>
+        <p:nvSpPr>
+          <p:cNvPr id="54" name="Date Placeholder 4"/>
           <p:cNvSpPr>
             <a:spLocks noGrp="1"/>
           </p:cNvSpPr>
@@ -3359,6 +3524,7 @@
           <a:bodyPr/>
           <a:lstStyle/>
           <a:p>
+            <a:pPr/>
             <a:fld id="{5BCAD085-E8A6-8845-BD4E-CB4CCA059FC4}" type="datetimeFigureOut">
               <a:rPr lang="en-US" smtClean="0"/>
               <a:t>1/27/13</a:t>
@@ -3369,7 +3535,7 @@
       </p:sp>
       <p:sp>
         <p:nvSpPr>
-          <p:cNvPr id="6" name="Footer Placeholder 5"/>
+          <p:cNvPr id="55" name="Footer Placeholder 5"/>
           <p:cNvSpPr>
             <a:spLocks noGrp="1"/>
           </p:cNvSpPr>
@@ -3382,13 +3548,14 @@
           <a:bodyPr/>
           <a:lstStyle/>
           <a:p>
+            <a:pPr/>
             <a:endParaRPr lang="en-US"/>
           </a:p>
         </p:txBody>
       </p:sp>
       <p:sp>
         <p:nvSpPr>
-          <p:cNvPr id="7" name="Slide Number Placeholder 6"/>
+          <p:cNvPr id="56" name="Slide Number Placeholder 6"/>
           <p:cNvSpPr>
             <a:spLocks noGrp="1"/>
           </p:cNvSpPr>
@@ -3401,6 +3568,7 @@
           <a:bodyPr/>
           <a:lstStyle/>
           <a:p>
+            <a:pPr/>
             <a:fld id="{C1FF6DA9-008F-8B48-92A6-B652298478BF}" type="slidenum">
               <a:rPr lang="en-US" smtClean="0"/>
               <a:t>‹#›</a:t>
@@ -3410,11 +3578,6 @@
         </p:txBody>
       </p:sp>
     </p:spTree>
-    <p:extLst>
-      <p:ext uri="{BB962C8B-B14F-4D97-AF65-F5344CB8AC3E}">
-        <p14:creationId xmlns:p14="http://schemas.microsoft.com/office/powerpoint/2010/main" val="1840726560"/>
-      </p:ext>
-    </p:extLst>
   </p:cSld>
   <p:clrMapOvr>
     <a:masterClrMapping/>
@@ -3423,11 +3586,11 @@
 </file>
 
 <file path=ppt/slideLayouts/slideLayout9.xml><?xml version="1.0" encoding="utf-8"?>
-<p:sldLayout xmlns:a="http://schemas.openxmlformats.org/drawingml/2006/main" xmlns:r="http://schemas.openxmlformats.org/officeDocument/2006/relationships" xmlns:p="http://schemas.openxmlformats.org/presentationml/2006/main" type="picTx" preserve="1">
+<p:sldLayout xmlns:p="http://schemas.openxmlformats.org/presentationml/2006/main" xmlns:a="http://schemas.openxmlformats.org/drawingml/2006/main" type="picTx">
   <p:cSld name="Picture with Caption">
     <p:spTree>
       <p:nvGrpSpPr>
-        <p:cNvPr id="1" name=""/>
+        <p:cNvPr id="57" name=""/>
         <p:cNvGrpSpPr/>
         <p:nvPr/>
       </p:nvGrpSpPr>
@@ -3441,7 +3604,7 @@
       </p:grpSpPr>
       <p:sp>
         <p:nvSpPr>
-          <p:cNvPr id="2" name="Title 1"/>
+          <p:cNvPr id="58" name="Title 1"/>
           <p:cNvSpPr>
             <a:spLocks noGrp="1"/>
           </p:cNvSpPr>
@@ -3463,6 +3626,7 @@
             </a:lvl1pPr>
           </a:lstStyle>
           <a:p>
+            <a:pPr/>
             <a:r>
               <a:rPr lang="en-US" smtClean="0"/>
               <a:t>Click to edit Master title style</a:t>
@@ -3473,7 +3637,7 @@
       </p:sp>
       <p:sp>
         <p:nvSpPr>
-          <p:cNvPr id="3" name="Picture Placeholder 2"/>
+          <p:cNvPr id="59" name="Picture Placeholder 2"/>
           <p:cNvSpPr>
             <a:spLocks noGrp="1"/>
           </p:cNvSpPr>
@@ -3528,13 +3692,14 @@
             </a:lvl9pPr>
           </a:lstStyle>
           <a:p>
+            <a:pPr/>
             <a:endParaRPr lang="en-US"/>
           </a:p>
         </p:txBody>
       </p:sp>
       <p:sp>
         <p:nvSpPr>
-          <p:cNvPr id="4" name="Text Placeholder 3"/>
+          <p:cNvPr id="60" name="Text Placeholder 3"/>
           <p:cNvSpPr>
             <a:spLocks noGrp="1"/>
           </p:cNvSpPr>
@@ -3594,12 +3759,13 @@
               <a:rPr lang="en-US" smtClean="0"/>
               <a:t>Click to edit Master text styles</a:t>
             </a:r>
-          </a:p>
-        </p:txBody>
-      </p:sp>
-      <p:sp>
-        <p:nvSpPr>
-          <p:cNvPr id="5" name="Date Placeholder 4"/>
+            <a:endParaRPr/>
+          </a:p>
+        </p:txBody>
+      </p:sp>
+      <p:sp>
+        <p:nvSpPr>
+          <p:cNvPr id="61" name="Date Placeholder 4"/>
           <p:cNvSpPr>
             <a:spLocks noGrp="1"/>
           </p:cNvSpPr>
@@ -3612,6 +3778,7 @@
           <a:bodyPr/>
           <a:lstStyle/>
           <a:p>
+            <a:pPr/>
             <a:fld id="{5BCAD085-E8A6-8845-BD4E-CB4CCA059FC4}" type="datetimeFigureOut">
               <a:rPr lang="en-US" smtClean="0"/>
               <a:t>1/27/13</a:t>
@@ -3622,7 +3789,7 @@
       </p:sp>
       <p:sp>
         <p:nvSpPr>
-          <p:cNvPr id="6" name="Footer Placeholder 5"/>
+          <p:cNvPr id="62" name="Footer Placeholder 5"/>
           <p:cNvSpPr>
             <a:spLocks noGrp="1"/>
           </p:cNvSpPr>
@@ -3635,13 +3802,14 @@
           <a:bodyPr/>
           <a:lstStyle/>
           <a:p>
+            <a:pPr/>
             <a:endParaRPr lang="en-US"/>
           </a:p>
         </p:txBody>
       </p:sp>
       <p:sp>
         <p:nvSpPr>
-          <p:cNvPr id="7" name="Slide Number Placeholder 6"/>
+          <p:cNvPr id="63" name="Slide Number Placeholder 6"/>
           <p:cNvSpPr>
             <a:spLocks noGrp="1"/>
           </p:cNvSpPr>
@@ -3654,6 +3822,7 @@
           <a:bodyPr/>
           <a:lstStyle/>
           <a:p>
+            <a:pPr/>
             <a:fld id="{C1FF6DA9-008F-8B48-92A6-B652298478BF}" type="slidenum">
               <a:rPr lang="en-US" smtClean="0"/>
               <a:t>‹#›</a:t>
@@ -3663,11 +3832,6 @@
         </p:txBody>
       </p:sp>
     </p:spTree>
-    <p:extLst>
-      <p:ext uri="{BB962C8B-B14F-4D97-AF65-F5344CB8AC3E}">
-        <p14:creationId xmlns:p14="http://schemas.microsoft.com/office/powerpoint/2010/main" val="3889236939"/>
-      </p:ext>
-    </p:extLst>
   </p:cSld>
   <p:clrMapOvr>
     <a:masterClrMapping/>
@@ -3676,7 +3840,7 @@
 </file>
 
 <file path=ppt/slideMasters/slideMaster1.xml><?xml version="1.0" encoding="utf-8"?>
-<p:sldMaster xmlns:a="http://schemas.openxmlformats.org/drawingml/2006/main" xmlns:r="http://schemas.openxmlformats.org/officeDocument/2006/relationships" xmlns:p="http://schemas.openxmlformats.org/presentationml/2006/main">
+<p:sldMaster xmlns:p="http://schemas.openxmlformats.org/presentationml/2006/main" xmlns:a="http://schemas.openxmlformats.org/drawingml/2006/main" xmlns:r="http://schemas.openxmlformats.org/officeDocument/2006/relationships">
   <p:cSld>
     <p:bg>
       <p:bgRef idx="1001">
@@ -3722,6 +3886,7 @@
           </a:bodyPr>
           <a:lstStyle/>
           <a:p>
+            <a:pPr/>
             <a:r>
               <a:rPr lang="en-US" smtClean="0"/>
               <a:t>Click to edit Master title style</a:t>
@@ -3760,6 +3925,7 @@
               <a:rPr lang="en-US" smtClean="0"/>
               <a:t>Click to edit Master text styles</a:t>
             </a:r>
+            <a:endParaRPr/>
           </a:p>
           <a:p>
             <a:pPr lvl="1"/>
@@ -3767,6 +3933,7 @@
               <a:rPr lang="en-US" smtClean="0"/>
               <a:t>Second level</a:t>
             </a:r>
+            <a:endParaRPr/>
           </a:p>
           <a:p>
             <a:pPr lvl="2"/>
@@ -3774,6 +3941,7 @@
               <a:rPr lang="en-US" smtClean="0"/>
               <a:t>Third level</a:t>
             </a:r>
+            <a:endParaRPr/>
           </a:p>
           <a:p>
             <a:pPr lvl="3"/>
@@ -3781,6 +3949,7 @@
               <a:rPr lang="en-US" smtClean="0"/>
               <a:t>Fourth level</a:t>
             </a:r>
+            <a:endParaRPr/>
           </a:p>
           <a:p>
             <a:pPr lvl="4"/>
@@ -3825,6 +3994,7 @@
             </a:lvl1pPr>
           </a:lstStyle>
           <a:p>
+            <a:pPr/>
             <a:fld id="{5BCAD085-E8A6-8845-BD4E-CB4CCA059FC4}" type="datetimeFigureOut">
               <a:rPr lang="en-US" smtClean="0"/>
               <a:t>1/27/13</a:t>
@@ -3866,6 +4036,7 @@
             </a:lvl1pPr>
           </a:lstStyle>
           <a:p>
+            <a:pPr/>
             <a:endParaRPr lang="en-US"/>
           </a:p>
         </p:txBody>
@@ -3903,6 +4074,7 @@
             </a:lvl1pPr>
           </a:lstStyle>
           <a:p>
+            <a:pPr/>
             <a:fld id="{C1FF6DA9-008F-8B48-92A6-B652298478BF}" type="slidenum">
               <a:rPr lang="en-US" smtClean="0"/>
               <a:t>‹#›</a:t>
@@ -3912,31 +4084,26 @@
         </p:txBody>
       </p:sp>
     </p:spTree>
-    <p:extLst>
-      <p:ext uri="{BB962C8B-B14F-4D97-AF65-F5344CB8AC3E}">
-        <p14:creationId xmlns:p14="http://schemas.microsoft.com/office/powerpoint/2010/main" val="2209977519"/>
-      </p:ext>
-    </p:extLst>
   </p:cSld>
   <p:clrMap bg1="lt1" tx1="dk1" bg2="lt2" tx2="dk2" accent1="accent1" accent2="accent2" accent3="accent3" accent4="accent4" accent5="accent5" accent6="accent6" hlink="hlink" folHlink="folHlink"/>
   <p:sldLayoutIdLst>
-    <p:sldLayoutId id="2147483649" r:id="rId1"/>
-    <p:sldLayoutId id="2147483650" r:id="rId2"/>
-    <p:sldLayoutId id="2147483651" r:id="rId3"/>
-    <p:sldLayoutId id="2147483652" r:id="rId4"/>
-    <p:sldLayoutId id="2147483653" r:id="rId5"/>
-    <p:sldLayoutId id="2147483654" r:id="rId6"/>
-    <p:sldLayoutId id="2147483655" r:id="rId7"/>
-    <p:sldLayoutId id="2147483656" r:id="rId8"/>
-    <p:sldLayoutId id="2147483657" r:id="rId9"/>
-    <p:sldLayoutId id="2147483658" r:id="rId10"/>
-    <p:sldLayoutId id="2147483659" r:id="rId11"/>
+    <p:sldLayoutId id="2147483649" r:id="rId0"/>
+    <p:sldLayoutId id="2147483650" r:id="rId1"/>
+    <p:sldLayoutId id="2147483651" r:id="rId2"/>
+    <p:sldLayoutId id="2147483652" r:id="rId3"/>
+    <p:sldLayoutId id="2147483653" r:id="rId4"/>
+    <p:sldLayoutId id="2147483654" r:id="rId5"/>
+    <p:sldLayoutId id="2147483655" r:id="rId6"/>
+    <p:sldLayoutId id="2147483656" r:id="rId7"/>
+    <p:sldLayoutId id="2147483657" r:id="rId8"/>
+    <p:sldLayoutId id="2147483658" r:id="rId9"/>
+    <p:sldLayoutId id="2147483659" r:id="rId10"/>
   </p:sldLayoutIdLst>
   <p:txStyles>
     <p:titleStyle>
       <a:lvl1pPr algn="ctr" defTabSz="457200" rtl="0" eaLnBrk="1" latinLnBrk="0" hangingPunct="1">
         <a:spcBef>
-          <a:spcPct val="0"/>
+          <a:spcPct val="1"/>
         </a:spcBef>
         <a:buNone/>
         <a:defRPr sz="4400" kern="1200">
@@ -4186,7 +4353,7 @@
 </file>
 
 <file path=ppt/slides/slide1.xml><?xml version="1.0" encoding="utf-8"?>
-<p:sld xmlns:a="http://schemas.openxmlformats.org/drawingml/2006/main" xmlns:p="http://schemas.openxmlformats.org/presentationml/2006/main" xmlns:r="http://schemas.openxmlformats.org/officeDocument/2006/relationships">
+<p:sld xmlns:p="http://schemas.openxmlformats.org/presentationml/2006/main" xmlns:a="http://schemas.openxmlformats.org/drawingml/2006/main" xmlns:r="http://schemas.openxmlformats.org/officeDocument/2006/relationships">
   <p:cSld>
     <p:spTree>
       <p:nvGrpSpPr>
@@ -4194,7 +4361,14 @@
         <p:cNvGrpSpPr/>
         <p:nvPr/>
       </p:nvGrpSpPr>
-      <p:grpSpPr/>
+      <p:grpSpPr>
+        <a:xfrm>
+          <a:off x="0" y="0"/>
+          <a:ext cx="0" cy="0"/>
+          <a:chOff x="0" y="0"/>
+          <a:chExt cx="0" cy="0"/>
+        </a:xfrm>
+      </p:grpSpPr>
       <p:sp>
         <p:nvSpPr>
           <p:cNvPr id="2" name="TextBox 1"/>
@@ -4212,7 +4386,7 @@
           <a:noFill/>
         </p:spPr>
         <p:txBody>
-          <a:bodyPr wrap="square" lIns="0" rIns="0" tIns="0" bIns="0" anchor="t">
+          <a:bodyPr wrap="square" lIns="0" tIns="0" rIns="0" bIns="0" anchor="t">
             <a:spAutoFit/>
           </a:bodyPr>
           <a:lstStyle/>
@@ -4227,6 +4401,7 @@
               </a:rPr>
               <a:t>SLIDE 1 / 7  ·  0:00 – 0:25</a:t>
             </a:r>
+            <a:endParaRPr/>
           </a:p>
         </p:txBody>
       </p:sp>
@@ -4247,7 +4422,7 @@
           <a:noFill/>
         </p:spPr>
         <p:txBody>
-          <a:bodyPr wrap="square" lIns="0" rIns="0" tIns="0" bIns="0" anchor="t">
+          <a:bodyPr wrap="square" lIns="0" tIns="0" rIns="0" bIns="0" anchor="t">
             <a:spAutoFit/>
           </a:bodyPr>
           <a:lstStyle/>
@@ -4262,6 +4437,7 @@
               </a:rPr>
               <a:t>A student seller, scattered chats and stock in her head</a:t>
             </a:r>
+            <a:endParaRPr/>
           </a:p>
         </p:txBody>
       </p:sp>
@@ -4303,7 +4479,7 @@
           </a:fontRef>
         </p:style>
         <p:txBody>
-          <a:bodyPr rtlCol="0" anchor="ctr" lIns="20000" tIns="0"/>
+          <a:bodyPr lIns="20000" tIns="0" rtlCol="0" anchor="ctr"/>
           <a:lstStyle/>
           <a:p>
             <a:pPr algn="ctr"/>
@@ -4316,6 +4492,7 @@
               </a:rPr>
               <a:t>Criterion 1 · Real problem &amp; user</a:t>
             </a:r>
+            <a:endParaRPr/>
           </a:p>
         </p:txBody>
       </p:sp>
@@ -4359,6 +4536,7 @@
           <a:lstStyle/>
           <a:p>
             <a:pPr algn="ctr"/>
+            <a:endParaRPr/>
           </a:p>
         </p:txBody>
       </p:sp>
@@ -4379,7 +4557,7 @@
           <a:noFill/>
         </p:spPr>
         <p:txBody>
-          <a:bodyPr wrap="square" lIns="0" rIns="0" tIns="0" bIns="0" anchor="t">
+          <a:bodyPr wrap="square" lIns="0" tIns="0" rIns="0" bIns="0" anchor="t">
             <a:spAutoFit/>
           </a:bodyPr>
           <a:lstStyle/>
@@ -4394,6 +4572,7 @@
               </a:rPr>
               <a:t>Orders on WhatsApp.</a:t>
             </a:r>
+            <a:endParaRPr/>
           </a:p>
           <a:p>
             <a:pPr algn="l"/>
@@ -4406,6 +4585,7 @@
               </a:rPr>
               <a:t>Money in 22 sample chats — Touch 'n Go, online banking, cash.</a:t>
             </a:r>
+            <a:endParaRPr/>
           </a:p>
           <a:p>
             <a:pPr algn="l"/>
@@ -4418,6 +4598,7 @@
               </a:rPr>
               <a:t>Stock tracked in her head.</a:t>
             </a:r>
+            <a:endParaRPr/>
           </a:p>
           <a:p>
             <a:pPr algn="l"/>
@@ -4430,6 +4611,7 @@
               </a:rPr>
               <a:t>No time to learn another dashboard.</a:t>
             </a:r>
+            <a:endParaRPr/>
           </a:p>
           <a:p>
             <a:pPr algn="l"/>
@@ -4442,6 +4624,7 @@
               </a:rPr>
               <a:t>She needs someone to do the work.</a:t>
             </a:r>
+            <a:endParaRPr/>
           </a:p>
         </p:txBody>
       </p:sp>
@@ -4489,6 +4672,7 @@
           <a:lstStyle/>
           <a:p>
             <a:pPr algn="ctr"/>
+            <a:endParaRPr/>
           </a:p>
         </p:txBody>
       </p:sp>
@@ -4533,7 +4717,7 @@
           <a:noFill/>
         </p:spPr>
         <p:txBody>
-          <a:bodyPr wrap="square" lIns="0" rIns="0" tIns="0" bIns="0" anchor="t">
+          <a:bodyPr wrap="square" lIns="0" tIns="0" rIns="0" bIns="0" anchor="t">
             <a:spAutoFit/>
           </a:bodyPr>
           <a:lstStyle/>
@@ -4548,6 +4732,7 @@
               </a:rPr>
               <a:t>Demo WhatsApp inbox — 14 customer chats visible. SYNTHETIC.</a:t>
             </a:r>
+            <a:endParaRPr/>
           </a:p>
         </p:txBody>
       </p:sp>
@@ -4568,7 +4753,7 @@
           <a:noFill/>
         </p:spPr>
         <p:txBody>
-          <a:bodyPr wrap="square" lIns="0" rIns="0" tIns="0" bIns="0" anchor="t">
+          <a:bodyPr wrap="square" lIns="0" tIns="0" rIns="0" bIns="0" anchor="t">
             <a:spAutoFit/>
           </a:bodyPr>
           <a:lstStyle/>
@@ -4583,6 +4768,7 @@
               </a:rPr>
               <a:t>Enterprise Buddy</a:t>
             </a:r>
+            <a:endParaRPr/>
           </a:p>
         </p:txBody>
       </p:sp>
@@ -4603,7 +4789,7 @@
           <a:noFill/>
         </p:spPr>
         <p:txBody>
-          <a:bodyPr wrap="square" lIns="0" rIns="0" tIns="0" bIns="0" anchor="t">
+          <a:bodyPr wrap="square" lIns="0" tIns="0" rIns="0" bIns="0" anchor="t">
             <a:spAutoFit/>
           </a:bodyPr>
           <a:lstStyle/>
@@ -4618,6 +4804,7 @@
               </a:rPr>
               <a:t>Synthetic demo data. No real payments move.</a:t>
             </a:r>
+            <a:endParaRPr/>
           </a:p>
         </p:txBody>
       </p:sp>
@@ -4630,18 +4817,25 @@
 </file>
 
 <file path=ppt/slides/slide2.xml><?xml version="1.0" encoding="utf-8"?>
-<p:sld xmlns:a="http://schemas.openxmlformats.org/drawingml/2006/main" xmlns:p="http://schemas.openxmlformats.org/presentationml/2006/main" xmlns:r="http://schemas.openxmlformats.org/officeDocument/2006/relationships">
+<p:sld xmlns:p="http://schemas.openxmlformats.org/presentationml/2006/main" xmlns:a="http://schemas.openxmlformats.org/drawingml/2006/main" xmlns:r="http://schemas.openxmlformats.org/officeDocument/2006/relationships">
   <p:cSld>
     <p:spTree>
       <p:nvGrpSpPr>
-        <p:cNvPr id="1" name=""/>
+        <p:cNvPr id="12" name=""/>
         <p:cNvGrpSpPr/>
         <p:nvPr/>
       </p:nvGrpSpPr>
-      <p:grpSpPr/>
-      <p:sp>
-        <p:nvSpPr>
-          <p:cNvPr id="2" name="TextBox 1"/>
+      <p:grpSpPr>
+        <a:xfrm>
+          <a:off x="0" y="0"/>
+          <a:ext cx="0" cy="0"/>
+          <a:chOff x="0" y="0"/>
+          <a:chExt cx="0" cy="0"/>
+        </a:xfrm>
+      </p:grpSpPr>
+      <p:sp>
+        <p:nvSpPr>
+          <p:cNvPr id="13" name="TextBox 1"/>
           <p:cNvSpPr txBox="1"/>
           <p:nvPr/>
         </p:nvSpPr>
@@ -4656,7 +4850,7 @@
           <a:noFill/>
         </p:spPr>
         <p:txBody>
-          <a:bodyPr wrap="square" lIns="0" rIns="0" tIns="0" bIns="0" anchor="t">
+          <a:bodyPr wrap="square" lIns="0" tIns="0" rIns="0" bIns="0" anchor="t">
             <a:spAutoFit/>
           </a:bodyPr>
           <a:lstStyle/>
@@ -4671,12 +4865,13 @@
               </a:rPr>
               <a:t>SLIDE 2 / 7  ·  0:25 – 0:50</a:t>
             </a:r>
-          </a:p>
-        </p:txBody>
-      </p:sp>
-      <p:sp>
-        <p:nvSpPr>
-          <p:cNvPr id="3" name="TextBox 2"/>
+            <a:endParaRPr/>
+          </a:p>
+        </p:txBody>
+      </p:sp>
+      <p:sp>
+        <p:nvSpPr>
+          <p:cNvPr id="14" name="TextBox 2"/>
           <p:cNvSpPr txBox="1"/>
           <p:nvPr/>
         </p:nvSpPr>
@@ -4691,7 +4886,7 @@
           <a:noFill/>
         </p:spPr>
         <p:txBody>
-          <a:bodyPr wrap="square" lIns="0" rIns="0" tIns="0" bIns="0" anchor="t">
+          <a:bodyPr wrap="square" lIns="0" tIns="0" rIns="0" bIns="0" anchor="t">
             <a:spAutoFit/>
           </a:bodyPr>
           <a:lstStyle/>
@@ -4706,12 +4901,13 @@
               </a:rPr>
               <a:t>WorkBuddy is the brain, not just the builder</a:t>
             </a:r>
-          </a:p>
-        </p:txBody>
-      </p:sp>
-      <p:sp>
-        <p:nvSpPr>
-          <p:cNvPr id="4" name="Rounded Rectangle 3"/>
+            <a:endParaRPr/>
+          </a:p>
+        </p:txBody>
+      </p:sp>
+      <p:sp>
+        <p:nvSpPr>
+          <p:cNvPr id="15" name="Rounded Rectangle 3"/>
           <p:cNvSpPr/>
           <p:nvPr/>
         </p:nvSpPr>
@@ -4747,7 +4943,7 @@
           </a:fontRef>
         </p:style>
         <p:txBody>
-          <a:bodyPr rtlCol="0" anchor="ctr" lIns="20000" tIns="0"/>
+          <a:bodyPr lIns="20000" tIns="0" rtlCol="0" anchor="ctr"/>
           <a:lstStyle/>
           <a:p>
             <a:pPr algn="ctr"/>
@@ -4760,12 +4956,13 @@
               </a:rPr>
               <a:t>Criterion 3 · Meaningful use of WorkBuddy</a:t>
             </a:r>
-          </a:p>
-        </p:txBody>
-      </p:sp>
-      <p:sp>
-        <p:nvSpPr>
-          <p:cNvPr id="5" name="Rectangle 4"/>
+            <a:endParaRPr/>
+          </a:p>
+        </p:txBody>
+      </p:sp>
+      <p:sp>
+        <p:nvSpPr>
+          <p:cNvPr id="16" name="Rectangle 4"/>
           <p:cNvSpPr/>
           <p:nvPr/>
         </p:nvSpPr>
@@ -4803,12 +5000,13 @@
           <a:lstStyle/>
           <a:p>
             <a:pPr algn="ctr"/>
-          </a:p>
-        </p:txBody>
-      </p:sp>
-      <p:sp>
-        <p:nvSpPr>
-          <p:cNvPr id="6" name="TextBox 5"/>
+            <a:endParaRPr/>
+          </a:p>
+        </p:txBody>
+      </p:sp>
+      <p:sp>
+        <p:nvSpPr>
+          <p:cNvPr id="17" name="TextBox 5"/>
           <p:cNvSpPr txBox="1"/>
           <p:nvPr/>
         </p:nvSpPr>
@@ -4823,7 +5021,7 @@
           <a:noFill/>
         </p:spPr>
         <p:txBody>
-          <a:bodyPr wrap="square" lIns="0" rIns="0" tIns="0" bIns="0" anchor="t">
+          <a:bodyPr wrap="square" lIns="0" tIns="0" rIns="0" bIns="0" anchor="t">
             <a:spAutoFit/>
           </a:bodyPr>
           <a:lstStyle/>
@@ -4838,6 +5036,7 @@
               </a:rPr>
               <a:t>Can our AI agent use WorkBuddy to solve a real problem — and actually get things done?</a:t>
             </a:r>
+            <a:endParaRPr/>
           </a:p>
           <a:p>
             <a:pPr algn="l"/>
@@ -4850,6 +5049,7 @@
               </a:rPr>
               <a:t>Yes.</a:t>
             </a:r>
+            <a:endParaRPr/>
           </a:p>
           <a:p>
             <a:pPr algn="l"/>
@@ -4862,6 +5062,7 @@
               </a:rPr>
               <a:t>WorkBuddy is the agent's runtime, not just the IDE we used to write code.</a:t>
             </a:r>
+            <a:endParaRPr/>
           </a:p>
           <a:p>
             <a:pPr algn="l"/>
@@ -4874,12 +5075,13 @@
               </a:rPr>
               <a:t>Every request goes to WorkBuddy. It plans, calls a read-only toolkit, searches the web, and returns actions the app runs.</a:t>
             </a:r>
-          </a:p>
-        </p:txBody>
-      </p:sp>
-      <p:sp>
-        <p:nvSpPr>
-          <p:cNvPr id="7" name="Rounded Rectangle 6"/>
+            <a:endParaRPr/>
+          </a:p>
+        </p:txBody>
+      </p:sp>
+      <p:sp>
+        <p:nvSpPr>
+          <p:cNvPr id="18" name="Rounded Rectangle 6"/>
           <p:cNvSpPr/>
           <p:nvPr/>
         </p:nvSpPr>
@@ -4921,12 +5123,13 @@
           <a:lstStyle/>
           <a:p>
             <a:pPr algn="ctr"/>
+            <a:endParaRPr/>
           </a:p>
         </p:txBody>
       </p:sp>
       <p:pic>
         <p:nvPicPr>
-          <p:cNvPr id="8" name="Picture 7" descr="02_chat.png"/>
+          <p:cNvPr id="19" name="Picture 7" descr="02_chat.png"/>
           <p:cNvPicPr>
             <a:picLocks noChangeAspect="1"/>
           </p:cNvPicPr>
@@ -4950,7 +5153,7 @@
       </p:pic>
       <p:sp>
         <p:nvSpPr>
-          <p:cNvPr id="9" name="TextBox 8"/>
+          <p:cNvPr id="20" name="TextBox 8"/>
           <p:cNvSpPr txBox="1"/>
           <p:nvPr/>
         </p:nvSpPr>
@@ -4965,7 +5168,7 @@
           <a:noFill/>
         </p:spPr>
         <p:txBody>
-          <a:bodyPr wrap="square" lIns="0" rIns="0" tIns="0" bIns="0" anchor="t">
+          <a:bodyPr wrap="square" lIns="0" tIns="0" rIns="0" bIns="0" anchor="t">
             <a:spAutoFit/>
           </a:bodyPr>
           <a:lstStyle/>
@@ -4980,12 +5183,13 @@
               </a:rPr>
               <a:t>One chat box. Suggested prompts adapt to Campus Crumb's data.</a:t>
             </a:r>
-          </a:p>
-        </p:txBody>
-      </p:sp>
-      <p:sp>
-        <p:nvSpPr>
-          <p:cNvPr id="10" name="TextBox 9"/>
+            <a:endParaRPr/>
+          </a:p>
+        </p:txBody>
+      </p:sp>
+      <p:sp>
+        <p:nvSpPr>
+          <p:cNvPr id="21" name="TextBox 9"/>
           <p:cNvSpPr txBox="1"/>
           <p:nvPr/>
         </p:nvSpPr>
@@ -5000,7 +5204,7 @@
           <a:noFill/>
         </p:spPr>
         <p:txBody>
-          <a:bodyPr wrap="square" lIns="0" rIns="0" tIns="0" bIns="0" anchor="t">
+          <a:bodyPr wrap="square" lIns="0" tIns="0" rIns="0" bIns="0" anchor="t">
             <a:spAutoFit/>
           </a:bodyPr>
           <a:lstStyle/>
@@ -5015,12 +5219,13 @@
               </a:rPr>
               <a:t>Enterprise Buddy</a:t>
             </a:r>
-          </a:p>
-        </p:txBody>
-      </p:sp>
-      <p:sp>
-        <p:nvSpPr>
-          <p:cNvPr id="11" name="TextBox 10"/>
+            <a:endParaRPr/>
+          </a:p>
+        </p:txBody>
+      </p:sp>
+      <p:sp>
+        <p:nvSpPr>
+          <p:cNvPr id="22" name="TextBox 10"/>
           <p:cNvSpPr txBox="1"/>
           <p:nvPr/>
         </p:nvSpPr>
@@ -5035,7 +5240,7 @@
           <a:noFill/>
         </p:spPr>
         <p:txBody>
-          <a:bodyPr wrap="square" lIns="0" rIns="0" tIns="0" bIns="0" anchor="t">
+          <a:bodyPr wrap="square" lIns="0" tIns="0" rIns="0" bIns="0" anchor="t">
             <a:spAutoFit/>
           </a:bodyPr>
           <a:lstStyle/>
@@ -5050,6 +5255,7 @@
               </a:rPr>
               <a:t>Synthetic demo data. No real payments move.</a:t>
             </a:r>
+            <a:endParaRPr/>
           </a:p>
         </p:txBody>
       </p:sp>
@@ -5062,18 +5268,25 @@
 </file>
 
 <file path=ppt/slides/slide3.xml><?xml version="1.0" encoding="utf-8"?>
-<p:sld xmlns:a="http://schemas.openxmlformats.org/drawingml/2006/main" xmlns:p="http://schemas.openxmlformats.org/presentationml/2006/main" xmlns:r="http://schemas.openxmlformats.org/officeDocument/2006/relationships">
+<p:sld xmlns:p="http://schemas.openxmlformats.org/presentationml/2006/main" xmlns:a="http://schemas.openxmlformats.org/drawingml/2006/main" xmlns:r="http://schemas.openxmlformats.org/officeDocument/2006/relationships">
   <p:cSld>
     <p:spTree>
       <p:nvGrpSpPr>
-        <p:cNvPr id="1" name=""/>
+        <p:cNvPr id="23" name=""/>
         <p:cNvGrpSpPr/>
         <p:nvPr/>
       </p:nvGrpSpPr>
-      <p:grpSpPr/>
-      <p:sp>
-        <p:nvSpPr>
-          <p:cNvPr id="2" name="TextBox 1"/>
+      <p:grpSpPr>
+        <a:xfrm>
+          <a:off x="0" y="0"/>
+          <a:ext cx="0" cy="0"/>
+          <a:chOff x="0" y="0"/>
+          <a:chExt cx="0" cy="0"/>
+        </a:xfrm>
+      </p:grpSpPr>
+      <p:sp>
+        <p:nvSpPr>
+          <p:cNvPr id="24" name="TextBox 1"/>
           <p:cNvSpPr txBox="1"/>
           <p:nvPr/>
         </p:nvSpPr>
@@ -5088,7 +5301,7 @@
           <a:noFill/>
         </p:spPr>
         <p:txBody>
-          <a:bodyPr wrap="square" lIns="0" rIns="0" tIns="0" bIns="0" anchor="t">
+          <a:bodyPr wrap="square" lIns="0" tIns="0" rIns="0" bIns="0" anchor="t">
             <a:spAutoFit/>
           </a:bodyPr>
           <a:lstStyle/>
@@ -5103,12 +5316,13 @@
               </a:rPr>
               <a:t>SLIDE 3 / 7  ·  0:50 – 1:30</a:t>
             </a:r>
-          </a:p>
-        </p:txBody>
-      </p:sp>
-      <p:sp>
-        <p:nvSpPr>
-          <p:cNvPr id="3" name="TextBox 2"/>
+            <a:endParaRPr/>
+          </a:p>
+        </p:txBody>
+      </p:sp>
+      <p:sp>
+        <p:nvSpPr>
+          <p:cNvPr id="25" name="TextBox 2"/>
           <p:cNvSpPr txBox="1"/>
           <p:nvPr/>
         </p:nvSpPr>
@@ -5123,7 +5337,7 @@
           <a:noFill/>
         </p:spPr>
         <p:txBody>
-          <a:bodyPr wrap="square" lIns="0" rIns="0" tIns="0" bIns="0" anchor="t">
+          <a:bodyPr wrap="square" lIns="0" tIns="0" rIns="0" bIns="0" anchor="t">
             <a:spAutoFit/>
           </a:bodyPr>
           <a:lstStyle/>
@@ -5138,12 +5352,13 @@
               </a:rPr>
               <a:t>One prompt → plan → departments → owner approval</a:t>
             </a:r>
-          </a:p>
-        </p:txBody>
-      </p:sp>
-      <p:sp>
-        <p:nvSpPr>
-          <p:cNvPr id="4" name="Rounded Rectangle 3"/>
+            <a:endParaRPr/>
+          </a:p>
+        </p:txBody>
+      </p:sp>
+      <p:sp>
+        <p:nvSpPr>
+          <p:cNvPr id="26" name="Rounded Rectangle 3"/>
           <p:cNvSpPr/>
           <p:nvPr/>
         </p:nvSpPr>
@@ -5179,7 +5394,7 @@
           </a:fontRef>
         </p:style>
         <p:txBody>
-          <a:bodyPr rtlCol="0" anchor="ctr" lIns="20000" tIns="0"/>
+          <a:bodyPr lIns="20000" tIns="0" rtlCol="0" anchor="ctr"/>
           <a:lstStyle/>
           <a:p>
             <a:pPr algn="ctr"/>
@@ -5192,12 +5407,13 @@
               </a:rPr>
               <a:t>Criteria 2 + 4 · Agentic · End-to-end</a:t>
             </a:r>
-          </a:p>
-        </p:txBody>
-      </p:sp>
-      <p:sp>
-        <p:nvSpPr>
-          <p:cNvPr id="5" name="Rectangle 4"/>
+            <a:endParaRPr/>
+          </a:p>
+        </p:txBody>
+      </p:sp>
+      <p:sp>
+        <p:nvSpPr>
+          <p:cNvPr id="27" name="Rectangle 4"/>
           <p:cNvSpPr/>
           <p:nvPr/>
         </p:nvSpPr>
@@ -5235,12 +5451,13 @@
           <a:lstStyle/>
           <a:p>
             <a:pPr algn="ctr"/>
-          </a:p>
-        </p:txBody>
-      </p:sp>
-      <p:sp>
-        <p:nvSpPr>
-          <p:cNvPr id="6" name="TextBox 5"/>
+            <a:endParaRPr/>
+          </a:p>
+        </p:txBody>
+      </p:sp>
+      <p:sp>
+        <p:nvSpPr>
+          <p:cNvPr id="28" name="TextBox 5"/>
           <p:cNvSpPr txBox="1"/>
           <p:nvPr/>
         </p:nvSpPr>
@@ -5255,7 +5472,7 @@
           <a:noFill/>
         </p:spPr>
         <p:txBody>
-          <a:bodyPr wrap="square" lIns="0" rIns="0" tIns="0" bIns="0" anchor="t">
+          <a:bodyPr wrap="square" lIns="0" tIns="0" rIns="0" bIns="0" anchor="t">
             <a:spAutoFit/>
           </a:bodyPr>
           <a:lstStyle/>
@@ -5270,6 +5487,7 @@
               </a:rPr>
               <a:t>Prompt: "I want to sell kuih at my campus near Universiti Malaya."</a:t>
             </a:r>
+            <a:endParaRPr/>
           </a:p>
           <a:p>
             <a:pPr algn="l"/>
@@ -5282,6 +5500,7 @@
               </a:rPr>
               <a:t>WorkBuddy splits it: Operations scores suppliers · Strategy maps competitors from OpenStreetMap · Guides drafts permits · Marketing drafts posts.</a:t>
             </a:r>
+            <a:endParaRPr/>
           </a:p>
           <a:p>
             <a:pPr algn="l"/>
@@ -5294,6 +5513,7 @@
               </a:rPr>
               <a:t>Every step cites a real web page or the owner's own records.</a:t>
             </a:r>
+            <a:endParaRPr/>
           </a:p>
           <a:p>
             <a:pPr algn="l"/>
@@ -5306,6 +5526,7 @@
               </a:rPr>
               <a:t>A stale stock count triggers 'recount first' — never a wrong reorder.</a:t>
             </a:r>
+            <a:endParaRPr/>
           </a:p>
           <a:p>
             <a:pPr algn="l"/>
@@ -5318,12 +5539,13 @@
               </a:rPr>
               <a:t>And small things just work — "bought sugar, paid by TNG" becomes two money entries + an inventory top-up in one reply.</a:t>
             </a:r>
-          </a:p>
-        </p:txBody>
-      </p:sp>
-      <p:sp>
-        <p:nvSpPr>
-          <p:cNvPr id="7" name="Rounded Rectangle 6"/>
+            <a:endParaRPr/>
+          </a:p>
+        </p:txBody>
+      </p:sp>
+      <p:sp>
+        <p:nvSpPr>
+          <p:cNvPr id="29" name="Rounded Rectangle 6"/>
           <p:cNvSpPr/>
           <p:nvPr/>
         </p:nvSpPr>
@@ -5365,12 +5587,13 @@
           <a:lstStyle/>
           <a:p>
             <a:pPr algn="ctr"/>
+            <a:endParaRPr/>
           </a:p>
         </p:txBody>
       </p:sp>
       <p:pic>
         <p:nvPicPr>
-          <p:cNvPr id="8" name="Picture 7" descr="03_plan.png"/>
+          <p:cNvPr id="30" name="Picture 7" descr="03_plan.png"/>
           <p:cNvPicPr>
             <a:picLocks noChangeAspect="1"/>
           </p:cNvPicPr>
@@ -5394,7 +5617,7 @@
       </p:pic>
       <p:sp>
         <p:nvSpPr>
-          <p:cNvPr id="9" name="TextBox 8"/>
+          <p:cNvPr id="31" name="TextBox 8"/>
           <p:cNvSpPr txBox="1"/>
           <p:nvPr/>
         </p:nvSpPr>
@@ -5409,7 +5632,7 @@
           <a:noFill/>
         </p:spPr>
         <p:txBody>
-          <a:bodyPr wrap="square" lIns="0" rIns="0" tIns="0" bIns="0" anchor="t">
+          <a:bodyPr wrap="square" lIns="0" tIns="0" rIns="0" bIns="0" anchor="t">
             <a:spAutoFit/>
           </a:bodyPr>
           <a:lstStyle/>
@@ -5424,12 +5647,13 @@
               </a:rPr>
               <a:t>Plan P1–P5 with review panel and 60 real competitor places from OpenStreetMap.</a:t>
             </a:r>
-          </a:p>
-        </p:txBody>
-      </p:sp>
-      <p:sp>
-        <p:nvSpPr>
-          <p:cNvPr id="10" name="TextBox 9"/>
+            <a:endParaRPr/>
+          </a:p>
+        </p:txBody>
+      </p:sp>
+      <p:sp>
+        <p:nvSpPr>
+          <p:cNvPr id="32" name="TextBox 9"/>
           <p:cNvSpPr txBox="1"/>
           <p:nvPr/>
         </p:nvSpPr>
@@ -5444,7 +5668,7 @@
           <a:noFill/>
         </p:spPr>
         <p:txBody>
-          <a:bodyPr wrap="square" lIns="0" rIns="0" tIns="0" bIns="0" anchor="t">
+          <a:bodyPr wrap="square" lIns="0" tIns="0" rIns="0" bIns="0" anchor="t">
             <a:spAutoFit/>
           </a:bodyPr>
           <a:lstStyle/>
@@ -5459,12 +5683,13 @@
               </a:rPr>
               <a:t>Enterprise Buddy</a:t>
             </a:r>
-          </a:p>
-        </p:txBody>
-      </p:sp>
-      <p:sp>
-        <p:nvSpPr>
-          <p:cNvPr id="11" name="TextBox 10"/>
+            <a:endParaRPr/>
+          </a:p>
+        </p:txBody>
+      </p:sp>
+      <p:sp>
+        <p:nvSpPr>
+          <p:cNvPr id="33" name="TextBox 10"/>
           <p:cNvSpPr txBox="1"/>
           <p:nvPr/>
         </p:nvSpPr>
@@ -5479,7 +5704,7 @@
           <a:noFill/>
         </p:spPr>
         <p:txBody>
-          <a:bodyPr wrap="square" lIns="0" rIns="0" tIns="0" bIns="0" anchor="t">
+          <a:bodyPr wrap="square" lIns="0" tIns="0" rIns="0" bIns="0" anchor="t">
             <a:spAutoFit/>
           </a:bodyPr>
           <a:lstStyle/>
@@ -5494,6 +5719,7 @@
               </a:rPr>
               <a:t>Synthetic demo data. No real payments move.</a:t>
             </a:r>
+            <a:endParaRPr/>
           </a:p>
         </p:txBody>
       </p:sp>
@@ -5506,18 +5732,25 @@
 </file>
 
 <file path=ppt/slides/slide4.xml><?xml version="1.0" encoding="utf-8"?>
-<p:sld xmlns:a="http://schemas.openxmlformats.org/drawingml/2006/main" xmlns:p="http://schemas.openxmlformats.org/presentationml/2006/main" xmlns:r="http://schemas.openxmlformats.org/officeDocument/2006/relationships">
+<p:sld xmlns:p="http://schemas.openxmlformats.org/presentationml/2006/main" xmlns:a="http://schemas.openxmlformats.org/drawingml/2006/main" xmlns:r="http://schemas.openxmlformats.org/officeDocument/2006/relationships">
   <p:cSld>
     <p:spTree>
       <p:nvGrpSpPr>
-        <p:cNvPr id="1" name=""/>
+        <p:cNvPr id="34" name=""/>
         <p:cNvGrpSpPr/>
         <p:nvPr/>
       </p:nvGrpSpPr>
-      <p:grpSpPr/>
-      <p:sp>
-        <p:nvSpPr>
-          <p:cNvPr id="2" name="TextBox 1"/>
+      <p:grpSpPr>
+        <a:xfrm>
+          <a:off x="0" y="0"/>
+          <a:ext cx="0" cy="0"/>
+          <a:chOff x="0" y="0"/>
+          <a:chExt cx="0" cy="0"/>
+        </a:xfrm>
+      </p:grpSpPr>
+      <p:sp>
+        <p:nvSpPr>
+          <p:cNvPr id="35" name="TextBox 1"/>
           <p:cNvSpPr txBox="1"/>
           <p:nvPr/>
         </p:nvSpPr>
@@ -5532,7 +5765,7 @@
           <a:noFill/>
         </p:spPr>
         <p:txBody>
-          <a:bodyPr wrap="square" lIns="0" rIns="0" tIns="0" bIns="0" anchor="t">
+          <a:bodyPr wrap="square" lIns="0" tIns="0" rIns="0" bIns="0" anchor="t">
             <a:spAutoFit/>
           </a:bodyPr>
           <a:lstStyle/>
@@ -5547,12 +5780,13 @@
               </a:rPr>
               <a:t>SLIDE 4 / 7  ·  1:30 – 2:05</a:t>
             </a:r>
-          </a:p>
-        </p:txBody>
-      </p:sp>
-      <p:sp>
-        <p:nvSpPr>
-          <p:cNvPr id="3" name="TextBox 2"/>
+            <a:endParaRPr/>
+          </a:p>
+        </p:txBody>
+      </p:sp>
+      <p:sp>
+        <p:nvSpPr>
+          <p:cNvPr id="36" name="TextBox 2"/>
           <p:cNvSpPr txBox="1"/>
           <p:nvPr/>
         </p:nvSpPr>
@@ -5567,7 +5801,7 @@
           <a:noFill/>
         </p:spPr>
         <p:txBody>
-          <a:bodyPr wrap="square" lIns="0" rIns="0" tIns="0" bIns="0" anchor="t">
+          <a:bodyPr wrap="square" lIns="0" tIns="0" rIns="0" bIns="0" anchor="t">
             <a:spAutoFit/>
           </a:bodyPr>
           <a:lstStyle/>
@@ -5582,12 +5816,13 @@
               </a:rPr>
               <a:t>Money in, money out, and the alerts that matter</a:t>
             </a:r>
-          </a:p>
-        </p:txBody>
-      </p:sp>
-      <p:sp>
-        <p:nvSpPr>
-          <p:cNvPr id="4" name="Rounded Rectangle 3"/>
+            <a:endParaRPr/>
+          </a:p>
+        </p:txBody>
+      </p:sp>
+      <p:sp>
+        <p:nvSpPr>
+          <p:cNvPr id="37" name="Rounded Rectangle 3"/>
           <p:cNvSpPr/>
           <p:nvPr/>
         </p:nvSpPr>
@@ -5623,7 +5858,7 @@
           </a:fontRef>
         </p:style>
         <p:txBody>
-          <a:bodyPr rtlCol="0" anchor="ctr" lIns="20000" tIns="0"/>
+          <a:bodyPr lIns="20000" tIns="0" rtlCol="0" anchor="ctr"/>
           <a:lstStyle/>
           <a:p>
             <a:pPr algn="ctr"/>
@@ -5636,12 +5871,13 @@
               </a:rPr>
               <a:t>Criterion 5 · Usable results</a:t>
             </a:r>
-          </a:p>
-        </p:txBody>
-      </p:sp>
-      <p:sp>
-        <p:nvSpPr>
-          <p:cNvPr id="5" name="Rectangle 4"/>
+            <a:endParaRPr/>
+          </a:p>
+        </p:txBody>
+      </p:sp>
+      <p:sp>
+        <p:nvSpPr>
+          <p:cNvPr id="38" name="Rectangle 4"/>
           <p:cNvSpPr/>
           <p:nvPr/>
         </p:nvSpPr>
@@ -5679,12 +5915,13 @@
           <a:lstStyle/>
           <a:p>
             <a:pPr algn="ctr"/>
-          </a:p>
-        </p:txBody>
-      </p:sp>
-      <p:sp>
-        <p:nvSpPr>
-          <p:cNvPr id="6" name="Rounded Rectangle 5"/>
+            <a:endParaRPr/>
+          </a:p>
+        </p:txBody>
+      </p:sp>
+      <p:sp>
+        <p:nvSpPr>
+          <p:cNvPr id="39" name="Rounded Rectangle 5"/>
           <p:cNvSpPr/>
           <p:nvPr/>
         </p:nvSpPr>
@@ -5726,12 +5963,13 @@
           <a:lstStyle/>
           <a:p>
             <a:pPr algn="ctr"/>
-          </a:p>
-        </p:txBody>
-      </p:sp>
-      <p:sp>
-        <p:nvSpPr>
-          <p:cNvPr id="7" name="TextBox 6"/>
+            <a:endParaRPr/>
+          </a:p>
+        </p:txBody>
+      </p:sp>
+      <p:sp>
+        <p:nvSpPr>
+          <p:cNvPr id="40" name="TextBox 6"/>
           <p:cNvSpPr txBox="1"/>
           <p:nvPr/>
         </p:nvSpPr>
@@ -5746,7 +5984,7 @@
           <a:noFill/>
         </p:spPr>
         <p:txBody>
-          <a:bodyPr wrap="square" lIns="0" rIns="0" tIns="0" bIns="0" anchor="t">
+          <a:bodyPr wrap="square" lIns="0" tIns="0" rIns="0" bIns="0" anchor="t">
             <a:spAutoFit/>
           </a:bodyPr>
           <a:lstStyle/>
@@ -5761,12 +5999,13 @@
               </a:rPr>
               <a:t>Money Flow · synthetic demo data</a:t>
             </a:r>
-          </a:p>
-        </p:txBody>
-      </p:sp>
-      <p:sp>
-        <p:nvSpPr>
-          <p:cNvPr id="8" name="TextBox 7"/>
+            <a:endParaRPr/>
+          </a:p>
+        </p:txBody>
+      </p:sp>
+      <p:sp>
+        <p:nvSpPr>
+          <p:cNvPr id="41" name="TextBox 7"/>
           <p:cNvSpPr txBox="1"/>
           <p:nvPr/>
         </p:nvSpPr>
@@ -5781,7 +6020,7 @@
           <a:noFill/>
         </p:spPr>
         <p:txBody>
-          <a:bodyPr wrap="square" lIns="0" rIns="0" tIns="0" bIns="0" anchor="t">
+          <a:bodyPr wrap="square" lIns="0" tIns="0" rIns="0" bIns="0" anchor="t">
             <a:spAutoFit/>
           </a:bodyPr>
           <a:lstStyle/>
@@ -5796,12 +6035,13 @@
               </a:rPr>
               <a:t>MYR 2,507.25 in</a:t>
             </a:r>
-          </a:p>
-        </p:txBody>
-      </p:sp>
-      <p:sp>
-        <p:nvSpPr>
-          <p:cNvPr id="9" name="TextBox 8"/>
+            <a:endParaRPr/>
+          </a:p>
+        </p:txBody>
+      </p:sp>
+      <p:sp>
+        <p:nvSpPr>
+          <p:cNvPr id="42" name="TextBox 8"/>
           <p:cNvSpPr txBox="1"/>
           <p:nvPr/>
         </p:nvSpPr>
@@ -5816,7 +6056,7 @@
           <a:noFill/>
         </p:spPr>
         <p:txBody>
-          <a:bodyPr wrap="square" lIns="0" rIns="0" tIns="0" bIns="0" anchor="t">
+          <a:bodyPr wrap="square" lIns="0" tIns="0" rIns="0" bIns="0" anchor="t">
             <a:spAutoFit/>
           </a:bodyPr>
           <a:lstStyle/>
@@ -5831,12 +6071,13 @@
               </a:rPr>
               <a:t>MYR 1,172.30 out</a:t>
             </a:r>
-          </a:p>
-        </p:txBody>
-      </p:sp>
-      <p:sp>
-        <p:nvSpPr>
-          <p:cNvPr id="10" name="TextBox 9"/>
+            <a:endParaRPr/>
+          </a:p>
+        </p:txBody>
+      </p:sp>
+      <p:sp>
+        <p:nvSpPr>
+          <p:cNvPr id="43" name="TextBox 9"/>
           <p:cNvSpPr txBox="1"/>
           <p:nvPr/>
         </p:nvSpPr>
@@ -5851,7 +6092,7 @@
           <a:noFill/>
         </p:spPr>
         <p:txBody>
-          <a:bodyPr wrap="square" lIns="0" rIns="0" tIns="0" bIns="0" anchor="t">
+          <a:bodyPr wrap="square" lIns="0" tIns="0" rIns="0" bIns="0" anchor="t">
             <a:spAutoFit/>
           </a:bodyPr>
           <a:lstStyle/>
@@ -5866,12 +6107,13 @@
               </a:rPr>
               <a:t>MYR 1,334.95 kept</a:t>
             </a:r>
-          </a:p>
-        </p:txBody>
-      </p:sp>
-      <p:sp>
-        <p:nvSpPr>
-          <p:cNvPr id="11" name="TextBox 10"/>
+            <a:endParaRPr/>
+          </a:p>
+        </p:txBody>
+      </p:sp>
+      <p:sp>
+        <p:nvSpPr>
+          <p:cNvPr id="44" name="TextBox 10"/>
           <p:cNvSpPr txBox="1"/>
           <p:nvPr/>
         </p:nvSpPr>
@@ -5886,7 +6128,7 @@
           <a:noFill/>
         </p:spPr>
         <p:txBody>
-          <a:bodyPr wrap="square" lIns="0" rIns="0" tIns="0" bIns="0" anchor="t">
+          <a:bodyPr wrap="square" lIns="0" tIns="0" rIns="0" bIns="0" anchor="t">
             <a:spAutoFit/>
           </a:bodyPr>
           <a:lstStyle/>
@@ -5901,6 +6143,7 @@
               </a:rPr>
               <a:t>Orders from WhatsApp, Instagram and the online shop — AI prices from menu.csv.</a:t>
             </a:r>
+            <a:endParaRPr/>
           </a:p>
           <a:p>
             <a:pPr algn="l"/>
@@ -5913,6 +6156,7 @@
               </a:rPr>
               <a:t>Inventory with auto-reorder; supplier orders go to the supplier's WhatsApp after you approve.</a:t>
             </a:r>
+            <a:endParaRPr/>
           </a:p>
           <a:p>
             <a:pPr algn="l"/>
@@ -5925,6 +6169,7 @@
               </a:rPr>
               <a:t>Auto-posting · Customers &amp; reviews · Task checklist.</a:t>
             </a:r>
+            <a:endParaRPr/>
           </a:p>
           <a:p>
             <a:pPr algn="l"/>
@@ -5937,12 +6182,13 @@
               </a:rPr>
               <a:t>Heads-up: 'Cookies run out in 3.2 days — reorder now.'</a:t>
             </a:r>
-          </a:p>
-        </p:txBody>
-      </p:sp>
-      <p:sp>
-        <p:nvSpPr>
-          <p:cNvPr id="12" name="Rounded Rectangle 11"/>
+            <a:endParaRPr/>
+          </a:p>
+        </p:txBody>
+      </p:sp>
+      <p:sp>
+        <p:nvSpPr>
+          <p:cNvPr id="45" name="Rounded Rectangle 11"/>
           <p:cNvSpPr/>
           <p:nvPr/>
         </p:nvSpPr>
@@ -5984,12 +6230,13 @@
           <a:lstStyle/>
           <a:p>
             <a:pPr algn="ctr"/>
+            <a:endParaRPr/>
           </a:p>
         </p:txBody>
       </p:sp>
       <p:pic>
         <p:nvPicPr>
-          <p:cNvPr id="13" name="Picture 12" descr="04_money_flow.png"/>
+          <p:cNvPr id="46" name="Picture 12" descr="04_money_flow.png"/>
           <p:cNvPicPr>
             <a:picLocks noChangeAspect="1"/>
           </p:cNvPicPr>
@@ -6013,7 +6260,7 @@
       </p:pic>
       <p:sp>
         <p:nvSpPr>
-          <p:cNvPr id="14" name="TextBox 13"/>
+          <p:cNvPr id="47" name="TextBox 13"/>
           <p:cNvSpPr txBox="1"/>
           <p:nvPr/>
         </p:nvSpPr>
@@ -6028,7 +6275,7 @@
           <a:noFill/>
         </p:spPr>
         <p:txBody>
-          <a:bodyPr wrap="square" lIns="0" rIns="0" tIns="0" bIns="0" anchor="t">
+          <a:bodyPr wrap="square" lIns="0" tIns="0" rIns="0" bIns="0" anchor="t">
             <a:spAutoFit/>
           </a:bodyPr>
           <a:lstStyle/>
@@ -6043,12 +6290,13 @@
               </a:rPr>
               <a:t>Live Money Flow page. Verified: in MYR 2,507.25, out MYR 1,172.30. Synthetic.</a:t>
             </a:r>
-          </a:p>
-        </p:txBody>
-      </p:sp>
-      <p:sp>
-        <p:nvSpPr>
-          <p:cNvPr id="15" name="TextBox 14"/>
+            <a:endParaRPr/>
+          </a:p>
+        </p:txBody>
+      </p:sp>
+      <p:sp>
+        <p:nvSpPr>
+          <p:cNvPr id="48" name="TextBox 14"/>
           <p:cNvSpPr txBox="1"/>
           <p:nvPr/>
         </p:nvSpPr>
@@ -6063,7 +6311,7 @@
           <a:noFill/>
         </p:spPr>
         <p:txBody>
-          <a:bodyPr wrap="square" lIns="0" rIns="0" tIns="0" bIns="0" anchor="t">
+          <a:bodyPr wrap="square" lIns="0" tIns="0" rIns="0" bIns="0" anchor="t">
             <a:spAutoFit/>
           </a:bodyPr>
           <a:lstStyle/>
@@ -6078,12 +6326,13 @@
               </a:rPr>
               <a:t>Enterprise Buddy</a:t>
             </a:r>
-          </a:p>
-        </p:txBody>
-      </p:sp>
-      <p:sp>
-        <p:nvSpPr>
-          <p:cNvPr id="16" name="TextBox 15"/>
+            <a:endParaRPr/>
+          </a:p>
+        </p:txBody>
+      </p:sp>
+      <p:sp>
+        <p:nvSpPr>
+          <p:cNvPr id="49" name="TextBox 15"/>
           <p:cNvSpPr txBox="1"/>
           <p:nvPr/>
         </p:nvSpPr>
@@ -6098,7 +6347,7 @@
           <a:noFill/>
         </p:spPr>
         <p:txBody>
-          <a:bodyPr wrap="square" lIns="0" rIns="0" tIns="0" bIns="0" anchor="t">
+          <a:bodyPr wrap="square" lIns="0" tIns="0" rIns="0" bIns="0" anchor="t">
             <a:spAutoFit/>
           </a:bodyPr>
           <a:lstStyle/>
@@ -6113,6 +6362,7 @@
               </a:rPr>
               <a:t>Synthetic demo data. No real payments move.</a:t>
             </a:r>
+            <a:endParaRPr/>
           </a:p>
         </p:txBody>
       </p:sp>
@@ -6125,18 +6375,25 @@
 </file>
 
 <file path=ppt/slides/slide5.xml><?xml version="1.0" encoding="utf-8"?>
-<p:sld xmlns:a="http://schemas.openxmlformats.org/drawingml/2006/main" xmlns:p="http://schemas.openxmlformats.org/presentationml/2006/main" xmlns:r="http://schemas.openxmlformats.org/officeDocument/2006/relationships">
+<p:sld xmlns:p="http://schemas.openxmlformats.org/presentationml/2006/main" xmlns:a="http://schemas.openxmlformats.org/drawingml/2006/main" xmlns:r="http://schemas.openxmlformats.org/officeDocument/2006/relationships">
   <p:cSld>
     <p:spTree>
       <p:nvGrpSpPr>
-        <p:cNvPr id="1" name=""/>
+        <p:cNvPr id="50" name=""/>
         <p:cNvGrpSpPr/>
         <p:nvPr/>
       </p:nvGrpSpPr>
-      <p:grpSpPr/>
-      <p:sp>
-        <p:nvSpPr>
-          <p:cNvPr id="2" name="TextBox 1"/>
+      <p:grpSpPr>
+        <a:xfrm>
+          <a:off x="0" y="0"/>
+          <a:ext cx="0" cy="0"/>
+          <a:chOff x="0" y="0"/>
+          <a:chExt cx="0" cy="0"/>
+        </a:xfrm>
+      </p:grpSpPr>
+      <p:sp>
+        <p:nvSpPr>
+          <p:cNvPr id="51" name="TextBox 1"/>
           <p:cNvSpPr txBox="1"/>
           <p:nvPr/>
         </p:nvSpPr>
@@ -6151,7 +6408,7 @@
           <a:noFill/>
         </p:spPr>
         <p:txBody>
-          <a:bodyPr wrap="square" lIns="0" rIns="0" tIns="0" bIns="0" anchor="t">
+          <a:bodyPr wrap="square" lIns="0" tIns="0" rIns="0" bIns="0" anchor="t">
             <a:spAutoFit/>
           </a:bodyPr>
           <a:lstStyle/>
@@ -6166,12 +6423,13 @@
               </a:rPr>
               <a:t>SLIDE 5 / 7  ·  2:05 – 2:35</a:t>
             </a:r>
-          </a:p>
-        </p:txBody>
-      </p:sp>
-      <p:sp>
-        <p:nvSpPr>
-          <p:cNvPr id="3" name="TextBox 2"/>
+            <a:endParaRPr/>
+          </a:p>
+        </p:txBody>
+      </p:sp>
+      <p:sp>
+        <p:nvSpPr>
+          <p:cNvPr id="52" name="TextBox 2"/>
           <p:cNvSpPr txBox="1"/>
           <p:nvPr/>
         </p:nvSpPr>
@@ -6186,7 +6444,7 @@
           <a:noFill/>
         </p:spPr>
         <p:txBody>
-          <a:bodyPr wrap="square" lIns="0" rIns="0" tIns="0" bIns="0" anchor="t">
+          <a:bodyPr wrap="square" lIns="0" tIns="0" rIns="0" bIns="0" anchor="t">
             <a:spAutoFit/>
           </a:bodyPr>
           <a:lstStyle/>
@@ -6201,12 +6459,13 @@
               </a:rPr>
               <a:t>One chat. Owner approves. Real money never moves.</a:t>
             </a:r>
-          </a:p>
-        </p:txBody>
-      </p:sp>
-      <p:sp>
-        <p:nvSpPr>
-          <p:cNvPr id="4" name="Rounded Rectangle 3"/>
+            <a:endParaRPr/>
+          </a:p>
+        </p:txBody>
+      </p:sp>
+      <p:sp>
+        <p:nvSpPr>
+          <p:cNvPr id="53" name="Rounded Rectangle 3"/>
           <p:cNvSpPr/>
           <p:nvPr/>
         </p:nvSpPr>
@@ -6242,7 +6501,7 @@
           </a:fontRef>
         </p:style>
         <p:txBody>
-          <a:bodyPr rtlCol="0" anchor="ctr" lIns="20000" tIns="0"/>
+          <a:bodyPr lIns="20000" tIns="0" rtlCol="0" anchor="ctr"/>
           <a:lstStyle/>
           <a:p>
             <a:pPr algn="ctr"/>
@@ -6255,12 +6514,13 @@
               </a:rPr>
               <a:t>Criterion 5 · Ease of use · Safety</a:t>
             </a:r>
-          </a:p>
-        </p:txBody>
-      </p:sp>
-      <p:sp>
-        <p:nvSpPr>
-          <p:cNvPr id="5" name="Rectangle 4"/>
+            <a:endParaRPr/>
+          </a:p>
+        </p:txBody>
+      </p:sp>
+      <p:sp>
+        <p:nvSpPr>
+          <p:cNvPr id="54" name="Rectangle 4"/>
           <p:cNvSpPr/>
           <p:nvPr/>
         </p:nvSpPr>
@@ -6298,12 +6558,13 @@
           <a:lstStyle/>
           <a:p>
             <a:pPr algn="ctr"/>
-          </a:p>
-        </p:txBody>
-      </p:sp>
-      <p:sp>
-        <p:nvSpPr>
-          <p:cNvPr id="6" name="TextBox 5"/>
+            <a:endParaRPr/>
+          </a:p>
+        </p:txBody>
+      </p:sp>
+      <p:sp>
+        <p:nvSpPr>
+          <p:cNvPr id="55" name="TextBox 5"/>
           <p:cNvSpPr txBox="1"/>
           <p:nvPr/>
         </p:nvSpPr>
@@ -6318,7 +6579,7 @@
           <a:noFill/>
         </p:spPr>
         <p:txBody>
-          <a:bodyPr wrap="square" lIns="0" rIns="0" tIns="0" bIns="0" anchor="t">
+          <a:bodyPr wrap="square" lIns="0" tIns="0" rIns="0" bIns="0" anchor="t">
             <a:spAutoFit/>
           </a:bodyPr>
           <a:lstStyle/>
@@ -6333,6 +6594,7 @@
               </a:rPr>
               <a:t>Plain language and the top actions first.</a:t>
             </a:r>
+            <a:endParaRPr/>
           </a:p>
           <a:p>
             <a:pPr algn="l"/>
@@ -6345,6 +6607,7 @@
               </a:rPr>
               <a:t>Owner chooses how involved to be: quick answers, or a plan they approve step by step.</a:t>
             </a:r>
+            <a:endParaRPr/>
           </a:p>
           <a:p>
             <a:pPr algn="l"/>
@@ -6357,6 +6620,7 @@
               </a:rPr>
               <a:t>If the agent isn't sure, it asks.</a:t>
             </a:r>
+            <a:endParaRPr/>
           </a:p>
           <a:p>
             <a:pPr algn="l"/>
@@ -6369,6 +6633,7 @@
               </a:rPr>
               <a:t>Give it an order with no customer name and it asks 'Who is this order for?'</a:t>
             </a:r>
+            <a:endParaRPr/>
           </a:p>
           <a:p>
             <a:pPr algn="l"/>
@@ -6381,6 +6646,7 @@
               </a:rPr>
               <a:t>Every change has Undo. Every MYR figure is checked against the data.</a:t>
             </a:r>
+            <a:endParaRPr/>
           </a:p>
           <a:p>
             <a:pPr algn="l"/>
@@ -6393,12 +6659,13 @@
               </a:rPr>
               <a:t>Payments are simulated and wait for the owner's approval.</a:t>
             </a:r>
-          </a:p>
-        </p:txBody>
-      </p:sp>
-      <p:sp>
-        <p:nvSpPr>
-          <p:cNvPr id="7" name="Rounded Rectangle 6"/>
+            <a:endParaRPr/>
+          </a:p>
+        </p:txBody>
+      </p:sp>
+      <p:sp>
+        <p:nvSpPr>
+          <p:cNvPr id="56" name="Rounded Rectangle 6"/>
           <p:cNvSpPr/>
           <p:nvPr/>
         </p:nvSpPr>
@@ -6440,12 +6707,13 @@
           <a:lstStyle/>
           <a:p>
             <a:pPr algn="ctr"/>
+            <a:endParaRPr/>
           </a:p>
         </p:txBody>
       </p:sp>
       <p:pic>
         <p:nvPicPr>
-          <p:cNvPr id="8" name="Picture 7" descr="07_inventory.png"/>
+          <p:cNvPr id="57" name="Picture 7" descr="07_inventory.png"/>
           <p:cNvPicPr>
             <a:picLocks noChangeAspect="1"/>
           </p:cNvPicPr>
@@ -6469,7 +6737,7 @@
       </p:pic>
       <p:sp>
         <p:nvSpPr>
-          <p:cNvPr id="9" name="TextBox 8"/>
+          <p:cNvPr id="58" name="TextBox 8"/>
           <p:cNvSpPr txBox="1"/>
           <p:nvPr/>
         </p:nvSpPr>
@@ -6484,7 +6752,7 @@
           <a:noFill/>
         </p:spPr>
         <p:txBody>
-          <a:bodyPr wrap="square" lIns="0" rIns="0" tIns="0" bIns="0" anchor="t">
+          <a:bodyPr wrap="square" lIns="0" tIns="0" rIns="0" bIns="0" anchor="t">
             <a:spAutoFit/>
           </a:bodyPr>
           <a:lstStyle/>
@@ -6499,12 +6767,13 @@
               </a:rPr>
               <a:t>Inventory: 'Approve &amp; pay' / 'Not now' gate, supplier options, sources for every order.</a:t>
             </a:r>
-          </a:p>
-        </p:txBody>
-      </p:sp>
-      <p:sp>
-        <p:nvSpPr>
-          <p:cNvPr id="10" name="TextBox 9"/>
+            <a:endParaRPr/>
+          </a:p>
+        </p:txBody>
+      </p:sp>
+      <p:sp>
+        <p:nvSpPr>
+          <p:cNvPr id="59" name="TextBox 9"/>
           <p:cNvSpPr txBox="1"/>
           <p:nvPr/>
         </p:nvSpPr>
@@ -6519,7 +6788,7 @@
           <a:noFill/>
         </p:spPr>
         <p:txBody>
-          <a:bodyPr wrap="square" lIns="0" rIns="0" tIns="0" bIns="0" anchor="t">
+          <a:bodyPr wrap="square" lIns="0" tIns="0" rIns="0" bIns="0" anchor="t">
             <a:spAutoFit/>
           </a:bodyPr>
           <a:lstStyle/>
@@ -6534,12 +6803,13 @@
               </a:rPr>
               <a:t>Enterprise Buddy</a:t>
             </a:r>
-          </a:p>
-        </p:txBody>
-      </p:sp>
-      <p:sp>
-        <p:nvSpPr>
-          <p:cNvPr id="11" name="TextBox 10"/>
+            <a:endParaRPr/>
+          </a:p>
+        </p:txBody>
+      </p:sp>
+      <p:sp>
+        <p:nvSpPr>
+          <p:cNvPr id="60" name="TextBox 10"/>
           <p:cNvSpPr txBox="1"/>
           <p:nvPr/>
         </p:nvSpPr>
@@ -6554,7 +6824,7 @@
           <a:noFill/>
         </p:spPr>
         <p:txBody>
-          <a:bodyPr wrap="square" lIns="0" rIns="0" tIns="0" bIns="0" anchor="t">
+          <a:bodyPr wrap="square" lIns="0" tIns="0" rIns="0" bIns="0" anchor="t">
             <a:spAutoFit/>
           </a:bodyPr>
           <a:lstStyle/>
@@ -6569,6 +6839,7 @@
               </a:rPr>
               <a:t>Synthetic demo data. No real payments move.</a:t>
             </a:r>
+            <a:endParaRPr/>
           </a:p>
         </p:txBody>
       </p:sp>
@@ -6581,18 +6852,25 @@
 </file>
 
 <file path=ppt/slides/slide6.xml><?xml version="1.0" encoding="utf-8"?>
-<p:sld xmlns:a="http://schemas.openxmlformats.org/drawingml/2006/main" xmlns:p="http://schemas.openxmlformats.org/presentationml/2006/main" xmlns:r="http://schemas.openxmlformats.org/officeDocument/2006/relationships">
+<p:sld xmlns:p="http://schemas.openxmlformats.org/presentationml/2006/main" xmlns:a="http://schemas.openxmlformats.org/drawingml/2006/main" xmlns:r="http://schemas.openxmlformats.org/officeDocument/2006/relationships">
   <p:cSld>
     <p:spTree>
       <p:nvGrpSpPr>
-        <p:cNvPr id="1" name=""/>
+        <p:cNvPr id="61" name=""/>
         <p:cNvGrpSpPr/>
         <p:nvPr/>
       </p:nvGrpSpPr>
-      <p:grpSpPr/>
-      <p:sp>
-        <p:nvSpPr>
-          <p:cNvPr id="2" name="TextBox 1"/>
+      <p:grpSpPr>
+        <a:xfrm>
+          <a:off x="0" y="0"/>
+          <a:ext cx="0" cy="0"/>
+          <a:chOff x="0" y="0"/>
+          <a:chExt cx="0" cy="0"/>
+        </a:xfrm>
+      </p:grpSpPr>
+      <p:sp>
+        <p:nvSpPr>
+          <p:cNvPr id="62" name="TextBox 1"/>
           <p:cNvSpPr txBox="1"/>
           <p:nvPr/>
         </p:nvSpPr>
@@ -6607,7 +6885,7 @@
           <a:noFill/>
         </p:spPr>
         <p:txBody>
-          <a:bodyPr wrap="square" lIns="0" rIns="0" tIns="0" bIns="0" anchor="t">
+          <a:bodyPr wrap="square" lIns="0" tIns="0" rIns="0" bIns="0" anchor="t">
             <a:spAutoFit/>
           </a:bodyPr>
           <a:lstStyle/>
@@ -6622,12 +6900,13 @@
               </a:rPr>
               <a:t>SLIDE 6 / 7  ·  2:35 – 2:50</a:t>
             </a:r>
-          </a:p>
-        </p:txBody>
-      </p:sp>
-      <p:sp>
-        <p:nvSpPr>
-          <p:cNvPr id="3" name="TextBox 2"/>
+            <a:endParaRPr/>
+          </a:p>
+        </p:txBody>
+      </p:sp>
+      <p:sp>
+        <p:nvSpPr>
+          <p:cNvPr id="63" name="TextBox 2"/>
           <p:cNvSpPr txBox="1"/>
           <p:nvPr/>
         </p:nvSpPr>
@@ -6642,7 +6921,7 @@
           <a:noFill/>
         </p:spPr>
         <p:txBody>
-          <a:bodyPr wrap="square" lIns="0" rIns="0" tIns="0" bIns="0" anchor="t">
+          <a:bodyPr wrap="square" lIns="0" tIns="0" rIns="0" bIns="0" anchor="t">
             <a:spAutoFit/>
           </a:bodyPr>
           <a:lstStyle/>
@@ -6657,12 +6936,13 @@
               </a:rPr>
               <a:t>Tested on synthetic data. Real-user testing is next.</a:t>
             </a:r>
-          </a:p>
-        </p:txBody>
-      </p:sp>
-      <p:sp>
-        <p:nvSpPr>
-          <p:cNvPr id="4" name="Rounded Rectangle 3"/>
+            <a:endParaRPr/>
+          </a:p>
+        </p:txBody>
+      </p:sp>
+      <p:sp>
+        <p:nvSpPr>
+          <p:cNvPr id="64" name="Rounded Rectangle 3"/>
           <p:cNvSpPr/>
           <p:nvPr/>
         </p:nvSpPr>
@@ -6698,7 +6978,7 @@
           </a:fontRef>
         </p:style>
         <p:txBody>
-          <a:bodyPr rtlCol="0" anchor="ctr" lIns="20000" tIns="0"/>
+          <a:bodyPr lIns="20000" tIns="0" rtlCol="0" anchor="ctr"/>
           <a:lstStyle/>
           <a:p>
             <a:pPr algn="ctr"/>
@@ -6711,12 +6991,13 @@
               </a:rPr>
               <a:t>Criterion 5 · Verifiable</a:t>
             </a:r>
-          </a:p>
-        </p:txBody>
-      </p:sp>
-      <p:sp>
-        <p:nvSpPr>
-          <p:cNvPr id="5" name="Rectangle 4"/>
+            <a:endParaRPr/>
+          </a:p>
+        </p:txBody>
+      </p:sp>
+      <p:sp>
+        <p:nvSpPr>
+          <p:cNvPr id="65" name="Rectangle 4"/>
           <p:cNvSpPr/>
           <p:nvPr/>
         </p:nvSpPr>
@@ -6754,12 +7035,13 @@
           <a:lstStyle/>
           <a:p>
             <a:pPr algn="ctr"/>
-          </a:p>
-        </p:txBody>
-      </p:sp>
-      <p:sp>
-        <p:nvSpPr>
-          <p:cNvPr id="6" name="Rounded Rectangle 5"/>
+            <a:endParaRPr/>
+          </a:p>
+        </p:txBody>
+      </p:sp>
+      <p:sp>
+        <p:nvSpPr>
+          <p:cNvPr id="66" name="Rounded Rectangle 5"/>
           <p:cNvSpPr/>
           <p:nvPr/>
         </p:nvSpPr>
@@ -6801,12 +7083,13 @@
           <a:lstStyle/>
           <a:p>
             <a:pPr algn="ctr"/>
-          </a:p>
-        </p:txBody>
-      </p:sp>
-      <p:sp>
-        <p:nvSpPr>
-          <p:cNvPr id="7" name="TextBox 6"/>
+            <a:endParaRPr/>
+          </a:p>
+        </p:txBody>
+      </p:sp>
+      <p:sp>
+        <p:nvSpPr>
+          <p:cNvPr id="67" name="TextBox 6"/>
           <p:cNvSpPr txBox="1"/>
           <p:nvPr/>
         </p:nvSpPr>
@@ -6821,7 +7104,7 @@
           <a:noFill/>
         </p:spPr>
         <p:txBody>
-          <a:bodyPr wrap="square" lIns="0" rIns="0" tIns="0" bIns="0" anchor="t">
+          <a:bodyPr wrap="square" lIns="0" tIns="0" rIns="0" bIns="0" anchor="t">
             <a:spAutoFit/>
           </a:bodyPr>
           <a:lstStyle/>
@@ -6836,12 +7119,13 @@
               </a:rPr>
               <a:t>Evidence at a glance</a:t>
             </a:r>
-          </a:p>
-        </p:txBody>
-      </p:sp>
-      <p:sp>
-        <p:nvSpPr>
-          <p:cNvPr id="8" name="TextBox 7"/>
+            <a:endParaRPr/>
+          </a:p>
+        </p:txBody>
+      </p:sp>
+      <p:sp>
+        <p:nvSpPr>
+          <p:cNvPr id="68" name="TextBox 7"/>
           <p:cNvSpPr txBox="1"/>
           <p:nvPr/>
         </p:nvSpPr>
@@ -6856,7 +7140,7 @@
           <a:noFill/>
         </p:spPr>
         <p:txBody>
-          <a:bodyPr wrap="square" lIns="0" rIns="0" tIns="0" bIns="0" anchor="t">
+          <a:bodyPr wrap="square" lIns="0" tIns="0" rIns="0" bIns="0" anchor="t">
             <a:spAutoFit/>
           </a:bodyPr>
           <a:lstStyle/>
@@ -6871,6 +7155,7 @@
               </a:rPr>
               <a:t>• WorkBuddy CLI live, streaming events  (F1)</a:t>
             </a:r>
+            <a:endParaRPr/>
           </a:p>
           <a:p>
             <a:pPr algn="l"/>
@@ -6883,6 +7168,7 @@
               </a:rPr>
               <a:t>• Tool whitelist enforced  (F2)</a:t>
             </a:r>
+            <a:endParaRPr/>
           </a:p>
           <a:p>
             <a:pPr algn="l"/>
@@ -6895,6 +7181,7 @@
               </a:rPr>
               <a:t>• 'What needs my attention today?' → 9 plan items, verifier PASS  (test 1)</a:t>
             </a:r>
+            <a:endParaRPr/>
           </a:p>
           <a:p>
             <a:pPr algn="l"/>
@@ -6907,6 +7194,7 @@
               </a:rPr>
               <a:t>• Prompt-injection refused  (test 9)</a:t>
             </a:r>
+            <a:endParaRPr/>
           </a:p>
           <a:p>
             <a:pPr algn="l"/>
@@ -6919,6 +7207,7 @@
               </a:rPr>
               <a:t>• Approve 2 / reject 1, budget reconciled  (test 10)</a:t>
             </a:r>
+            <a:endParaRPr/>
           </a:p>
           <a:p>
             <a:pPr algn="l"/>
@@ -6931,6 +7220,7 @@
               </a:rPr>
               <a:t>• OpenStreetMap competitor map, 60 places  (S1)</a:t>
             </a:r>
+            <a:endParaRPr/>
           </a:p>
           <a:p>
             <a:pPr algn="l"/>
@@ -6943,6 +7233,7 @@
               </a:rPr>
               <a:t>• Auto-reorder on real stock, with sources  (S2)</a:t>
             </a:r>
+            <a:endParaRPr/>
           </a:p>
           <a:p>
             <a:pPr algn="l"/>
@@ -6955,6 +7246,7 @@
               </a:rPr>
               <a:t>• Auto-reply WhatsApp orders from menu.csv  (S3)</a:t>
             </a:r>
+            <a:endParaRPr/>
           </a:p>
           <a:p>
             <a:pPr algn="l"/>
@@ -6967,6 +7259,7 @@
               </a:rPr>
               <a:t>• Money Flow reconciles to verified brief  (S7)</a:t>
             </a:r>
+            <a:endParaRPr/>
           </a:p>
           <a:p>
             <a:pPr algn="l"/>
@@ -6979,6 +7272,7 @@
               </a:rPr>
               <a:t>• Number check caught invented figures  (S8)</a:t>
             </a:r>
+            <a:endParaRPr/>
           </a:p>
           <a:p>
             <a:pPr algn="l"/>
@@ -6991,6 +7285,7 @@
               </a:rPr>
               <a:t>• Undo verified for every change  (S9)</a:t>
             </a:r>
+            <a:endParaRPr/>
           </a:p>
           <a:p>
             <a:pPr algn="l"/>
@@ -7003,12 +7298,13 @@
               </a:rPr>
               <a:t>• 22 sample WhatsApp clients  (S4)</a:t>
             </a:r>
-          </a:p>
-        </p:txBody>
-      </p:sp>
-      <p:sp>
-        <p:nvSpPr>
-          <p:cNvPr id="9" name="TextBox 8"/>
+            <a:endParaRPr/>
+          </a:p>
+        </p:txBody>
+      </p:sp>
+      <p:sp>
+        <p:nvSpPr>
+          <p:cNvPr id="69" name="TextBox 8"/>
           <p:cNvSpPr txBox="1"/>
           <p:nvPr/>
         </p:nvSpPr>
@@ -7023,7 +7319,7 @@
           <a:noFill/>
         </p:spPr>
         <p:txBody>
-          <a:bodyPr wrap="square" lIns="0" rIns="0" tIns="0" bIns="0" anchor="t">
+          <a:bodyPr wrap="square" lIns="0" tIns="0" rIns="0" bIns="0" anchor="t">
             <a:spAutoFit/>
           </a:bodyPr>
           <a:lstStyle/>
@@ -7038,12 +7334,13 @@
               </a:rPr>
               <a:t>Full log: docs/AGENT_CONSOLE_TESTS.md</a:t>
             </a:r>
-          </a:p>
-        </p:txBody>
-      </p:sp>
-      <p:sp>
-        <p:nvSpPr>
-          <p:cNvPr id="10" name="Rounded Rectangle 9"/>
+            <a:endParaRPr/>
+          </a:p>
+        </p:txBody>
+      </p:sp>
+      <p:sp>
+        <p:nvSpPr>
+          <p:cNvPr id="70" name="Rounded Rectangle 9"/>
           <p:cNvSpPr/>
           <p:nvPr/>
         </p:nvSpPr>
@@ -7085,12 +7382,13 @@
           <a:lstStyle/>
           <a:p>
             <a:pPr algn="ctr"/>
+            <a:endParaRPr/>
           </a:p>
         </p:txBody>
       </p:sp>
       <p:pic>
         <p:nvPicPr>
-          <p:cNvPr id="11" name="Picture 10" descr="11_proof.png"/>
+          <p:cNvPr id="71" name="Picture 10" descr="11_proof.png"/>
           <p:cNvPicPr>
             <a:picLocks noChangeAspect="1"/>
           </p:cNvPicPr>
@@ -7114,7 +7412,7 @@
       </p:pic>
       <p:sp>
         <p:nvSpPr>
-          <p:cNvPr id="12" name="TextBox 11"/>
+          <p:cNvPr id="72" name="TextBox 11"/>
           <p:cNvSpPr txBox="1"/>
           <p:nvPr/>
         </p:nvSpPr>
@@ -7129,7 +7427,7 @@
           <a:noFill/>
         </p:spPr>
         <p:txBody>
-          <a:bodyPr wrap="square" lIns="0" rIns="0" tIns="0" bIns="0" anchor="t">
+          <a:bodyPr wrap="square" lIns="0" tIns="0" rIns="0" bIns="0" anchor="t">
             <a:spAutoFit/>
           </a:bodyPr>
           <a:lstStyle/>
@@ -7144,12 +7442,13 @@
               </a:rPr>
               <a:t>14-row evidence table rendered from the test log. Synthetic data only.</a:t>
             </a:r>
-          </a:p>
-        </p:txBody>
-      </p:sp>
-      <p:sp>
-        <p:nvSpPr>
-          <p:cNvPr id="13" name="TextBox 12"/>
+            <a:endParaRPr/>
+          </a:p>
+        </p:txBody>
+      </p:sp>
+      <p:sp>
+        <p:nvSpPr>
+          <p:cNvPr id="73" name="TextBox 12"/>
           <p:cNvSpPr txBox="1"/>
           <p:nvPr/>
         </p:nvSpPr>
@@ -7164,7 +7463,7 @@
           <a:noFill/>
         </p:spPr>
         <p:txBody>
-          <a:bodyPr wrap="square" lIns="0" rIns="0" tIns="0" bIns="0" anchor="t">
+          <a:bodyPr wrap="square" lIns="0" tIns="0" rIns="0" bIns="0" anchor="t">
             <a:spAutoFit/>
           </a:bodyPr>
           <a:lstStyle/>
@@ -7179,12 +7478,13 @@
               </a:rPr>
               <a:t>Enterprise Buddy</a:t>
             </a:r>
-          </a:p>
-        </p:txBody>
-      </p:sp>
-      <p:sp>
-        <p:nvSpPr>
-          <p:cNvPr id="14" name="TextBox 13"/>
+            <a:endParaRPr/>
+          </a:p>
+        </p:txBody>
+      </p:sp>
+      <p:sp>
+        <p:nvSpPr>
+          <p:cNvPr id="74" name="TextBox 13"/>
           <p:cNvSpPr txBox="1"/>
           <p:nvPr/>
         </p:nvSpPr>
@@ -7199,7 +7499,7 @@
           <a:noFill/>
         </p:spPr>
         <p:txBody>
-          <a:bodyPr wrap="square" lIns="0" rIns="0" tIns="0" bIns="0" anchor="t">
+          <a:bodyPr wrap="square" lIns="0" tIns="0" rIns="0" bIns="0" anchor="t">
             <a:spAutoFit/>
           </a:bodyPr>
           <a:lstStyle/>
@@ -7214,6 +7514,7 @@
               </a:rPr>
               <a:t>Synthetic demo data. No real payments move.</a:t>
             </a:r>
+            <a:endParaRPr/>
           </a:p>
         </p:txBody>
       </p:sp>
@@ -7226,18 +7527,25 @@
 </file>
 
 <file path=ppt/slides/slide7.xml><?xml version="1.0" encoding="utf-8"?>
-<p:sld xmlns:a="http://schemas.openxmlformats.org/drawingml/2006/main" xmlns:p="http://schemas.openxmlformats.org/presentationml/2006/main" xmlns:r="http://schemas.openxmlformats.org/officeDocument/2006/relationships">
+<p:sld xmlns:p="http://schemas.openxmlformats.org/presentationml/2006/main" xmlns:a="http://schemas.openxmlformats.org/drawingml/2006/main">
   <p:cSld>
     <p:spTree>
       <p:nvGrpSpPr>
-        <p:cNvPr id="1" name=""/>
+        <p:cNvPr id="75" name=""/>
         <p:cNvGrpSpPr/>
         <p:nvPr/>
       </p:nvGrpSpPr>
-      <p:grpSpPr/>
-      <p:sp>
-        <p:nvSpPr>
-          <p:cNvPr id="2" name="TextBox 1"/>
+      <p:grpSpPr>
+        <a:xfrm>
+          <a:off x="0" y="0"/>
+          <a:ext cx="0" cy="0"/>
+          <a:chOff x="0" y="0"/>
+          <a:chExt cx="0" cy="0"/>
+        </a:xfrm>
+      </p:grpSpPr>
+      <p:sp>
+        <p:nvSpPr>
+          <p:cNvPr id="76" name="TextBox 1"/>
           <p:cNvSpPr txBox="1"/>
           <p:nvPr/>
         </p:nvSpPr>
@@ -7252,7 +7560,7 @@
           <a:noFill/>
         </p:spPr>
         <p:txBody>
-          <a:bodyPr wrap="square" lIns="0" rIns="0" tIns="0" bIns="0" anchor="t">
+          <a:bodyPr wrap="square" lIns="0" tIns="0" rIns="0" bIns="0" anchor="t">
             <a:spAutoFit/>
           </a:bodyPr>
           <a:lstStyle/>
@@ -7267,12 +7575,13 @@
               </a:rPr>
               <a:t>SLIDE 7 / 7  ·  2:50 – 3:00</a:t>
             </a:r>
-          </a:p>
-        </p:txBody>
-      </p:sp>
-      <p:sp>
-        <p:nvSpPr>
-          <p:cNvPr id="3" name="TextBox 2"/>
+            <a:endParaRPr/>
+          </a:p>
+        </p:txBody>
+      </p:sp>
+      <p:sp>
+        <p:nvSpPr>
+          <p:cNvPr id="77" name="TextBox 2"/>
           <p:cNvSpPr txBox="1"/>
           <p:nvPr/>
         </p:nvSpPr>
@@ -7287,7 +7596,7 @@
           <a:noFill/>
         </p:spPr>
         <p:txBody>
-          <a:bodyPr wrap="square" lIns="0" rIns="0" tIns="0" bIns="0" anchor="t">
+          <a:bodyPr wrap="square" lIns="0" tIns="0" rIns="0" bIns="0" anchor="t">
             <a:spAutoFit/>
           </a:bodyPr>
           <a:lstStyle/>
@@ -7302,12 +7611,13 @@
               </a:rPr>
               <a:t>Thank you.</a:t>
             </a:r>
-          </a:p>
-        </p:txBody>
-      </p:sp>
-      <p:sp>
-        <p:nvSpPr>
-          <p:cNvPr id="4" name="Rounded Rectangle 3"/>
+            <a:endParaRPr/>
+          </a:p>
+        </p:txBody>
+      </p:sp>
+      <p:sp>
+        <p:nvSpPr>
+          <p:cNvPr id="78" name="Rounded Rectangle 3"/>
           <p:cNvSpPr/>
           <p:nvPr/>
         </p:nvSpPr>
@@ -7343,7 +7653,7 @@
           </a:fontRef>
         </p:style>
         <p:txBody>
-          <a:bodyPr rtlCol="0" anchor="ctr" lIns="20000" tIns="0"/>
+          <a:bodyPr lIns="20000" tIns="0" rtlCol="0" anchor="ctr"/>
           <a:lstStyle/>
           <a:p>
             <a:pPr algn="ctr"/>
@@ -7356,12 +7666,13 @@
               </a:rPr>
               <a:t>Repeat the core question</a:t>
             </a:r>
-          </a:p>
-        </p:txBody>
-      </p:sp>
-      <p:sp>
-        <p:nvSpPr>
-          <p:cNvPr id="5" name="Rectangle 4"/>
+            <a:endParaRPr/>
+          </a:p>
+        </p:txBody>
+      </p:sp>
+      <p:sp>
+        <p:nvSpPr>
+          <p:cNvPr id="79" name="Rectangle 4"/>
           <p:cNvSpPr/>
           <p:nvPr/>
         </p:nvSpPr>
@@ -7399,12 +7710,13 @@
           <a:lstStyle/>
           <a:p>
             <a:pPr algn="ctr"/>
-          </a:p>
-        </p:txBody>
-      </p:sp>
-      <p:sp>
-        <p:nvSpPr>
-          <p:cNvPr id="6" name="TextBox 5"/>
+            <a:endParaRPr/>
+          </a:p>
+        </p:txBody>
+      </p:sp>
+      <p:sp>
+        <p:nvSpPr>
+          <p:cNvPr id="80" name="TextBox 5"/>
           <p:cNvSpPr txBox="1"/>
           <p:nvPr/>
         </p:nvSpPr>
@@ -7419,7 +7731,7 @@
           <a:noFill/>
         </p:spPr>
         <p:txBody>
-          <a:bodyPr wrap="square" lIns="0" rIns="0" tIns="0" bIns="0" anchor="t">
+          <a:bodyPr wrap="square" lIns="0" tIns="0" rIns="0" bIns="0" anchor="t">
             <a:spAutoFit/>
           </a:bodyPr>
           <a:lstStyle/>
@@ -7434,12 +7746,13 @@
               </a:rPr>
               <a:t>Enterprise Buddy turns a messy side hustle into a business that runs itself — all from one chat.</a:t>
             </a:r>
-          </a:p>
-        </p:txBody>
-      </p:sp>
-      <p:sp>
-        <p:nvSpPr>
-          <p:cNvPr id="7" name="TextBox 6"/>
+            <a:endParaRPr/>
+          </a:p>
+        </p:txBody>
+      </p:sp>
+      <p:sp>
+        <p:nvSpPr>
+          <p:cNvPr id="81" name="TextBox 6"/>
           <p:cNvSpPr txBox="1"/>
           <p:nvPr/>
         </p:nvSpPr>
@@ -7454,7 +7767,7 @@
           <a:noFill/>
         </p:spPr>
         <p:txBody>
-          <a:bodyPr wrap="square" lIns="0" rIns="0" tIns="0" bIns="0" anchor="t">
+          <a:bodyPr wrap="square" lIns="0" tIns="0" rIns="0" bIns="0" anchor="t">
             <a:spAutoFit/>
           </a:bodyPr>
           <a:lstStyle/>
@@ -7469,12 +7782,13 @@
               </a:rPr>
               <a:t>Our AI agent uses WorkBuddy to solve a real problem, and it actually gets things done.</a:t>
             </a:r>
-          </a:p>
-        </p:txBody>
-      </p:sp>
-      <p:sp>
-        <p:nvSpPr>
-          <p:cNvPr id="8" name="TextBox 7"/>
+            <a:endParaRPr/>
+          </a:p>
+        </p:txBody>
+      </p:sp>
+      <p:sp>
+        <p:nvSpPr>
+          <p:cNvPr id="82" name="TextBox 7"/>
           <p:cNvSpPr txBox="1"/>
           <p:nvPr/>
         </p:nvSpPr>
@@ -7489,7 +7803,7 @@
           <a:noFill/>
         </p:spPr>
         <p:txBody>
-          <a:bodyPr wrap="square" lIns="0" rIns="0" tIns="0" bIns="0" anchor="t">
+          <a:bodyPr wrap="square" lIns="0" tIns="0" rIns="0" bIns="0" anchor="t">
             <a:spAutoFit/>
           </a:bodyPr>
           <a:lstStyle/>
@@ -7504,12 +7818,13 @@
               </a:rPr>
               <a:t>github.com/Griff1018/hackerdorm    ·    run with: PORT=8091 python console/server.py</a:t>
             </a:r>
-          </a:p>
-        </p:txBody>
-      </p:sp>
-      <p:sp>
-        <p:nvSpPr>
-          <p:cNvPr id="9" name="TextBox 8"/>
+            <a:endParaRPr/>
+          </a:p>
+        </p:txBody>
+      </p:sp>
+      <p:sp>
+        <p:nvSpPr>
+          <p:cNvPr id="83" name="TextBox 8"/>
           <p:cNvSpPr txBox="1"/>
           <p:nvPr/>
         </p:nvSpPr>
@@ -7524,7 +7839,7 @@
           <a:noFill/>
         </p:spPr>
         <p:txBody>
-          <a:bodyPr wrap="square" lIns="0" rIns="0" tIns="0" bIns="0" anchor="t">
+          <a:bodyPr wrap="square" lIns="0" tIns="0" rIns="0" bIns="0" anchor="t">
             <a:spAutoFit/>
           </a:bodyPr>
           <a:lstStyle/>
@@ -7539,12 +7854,13 @@
               </a:rPr>
               <a:t>Synthetic demo data. Live demo apps: WhatsApp, Instagram, LinkedIn, Enterprise Buddy Shop. Simulated: payments, online banking, Touch 'n Go, marketplaces.</a:t>
             </a:r>
-          </a:p>
-        </p:txBody>
-      </p:sp>
-      <p:sp>
-        <p:nvSpPr>
-          <p:cNvPr id="10" name="TextBox 9"/>
+            <a:endParaRPr/>
+          </a:p>
+        </p:txBody>
+      </p:sp>
+      <p:sp>
+        <p:nvSpPr>
+          <p:cNvPr id="84" name="TextBox 9"/>
           <p:cNvSpPr txBox="1"/>
           <p:nvPr/>
         </p:nvSpPr>
@@ -7559,7 +7875,7 @@
           <a:noFill/>
         </p:spPr>
         <p:txBody>
-          <a:bodyPr wrap="square" lIns="0" rIns="0" tIns="0" bIns="0" anchor="t">
+          <a:bodyPr wrap="square" lIns="0" tIns="0" rIns="0" bIns="0" anchor="t">
             <a:spAutoFit/>
           </a:bodyPr>
           <a:lstStyle/>
@@ -7574,12 +7890,13 @@
               </a:rPr>
               <a:t>Enterprise Buddy</a:t>
             </a:r>
-          </a:p>
-        </p:txBody>
-      </p:sp>
-      <p:sp>
-        <p:nvSpPr>
-          <p:cNvPr id="11" name="TextBox 10"/>
+            <a:endParaRPr/>
+          </a:p>
+        </p:txBody>
+      </p:sp>
+      <p:sp>
+        <p:nvSpPr>
+          <p:cNvPr id="85" name="TextBox 10"/>
           <p:cNvSpPr txBox="1"/>
           <p:nvPr/>
         </p:nvSpPr>
@@ -7594,7 +7911,7 @@
           <a:noFill/>
         </p:spPr>
         <p:txBody>
-          <a:bodyPr wrap="square" lIns="0" rIns="0" tIns="0" bIns="0" anchor="t">
+          <a:bodyPr wrap="square" lIns="0" tIns="0" rIns="0" bIns="0" anchor="t">
             <a:spAutoFit/>
           </a:bodyPr>
           <a:lstStyle/>
@@ -7609,6 +7926,7 @@
               </a:rPr>
               <a:t>Synthetic demo data. No real payments move.</a:t>
             </a:r>
+            <a:endParaRPr/>
           </a:p>
         </p:txBody>
       </p:sp>
@@ -7896,47 +8214,6 @@
       </a:bgFillStyleLst>
     </a:fmtScheme>
   </a:themeElements>
-  <a:objectDefaults>
-    <a:spDef>
-      <a:spPr/>
-      <a:bodyPr/>
-      <a:lstStyle/>
-      <a:style>
-        <a:lnRef idx="1">
-          <a:schemeClr val="accent1"/>
-        </a:lnRef>
-        <a:fillRef idx="3">
-          <a:schemeClr val="accent1"/>
-        </a:fillRef>
-        <a:effectRef idx="2">
-          <a:schemeClr val="accent1"/>
-        </a:effectRef>
-        <a:fontRef idx="minor">
-          <a:schemeClr val="lt1"/>
-        </a:fontRef>
-      </a:style>
-    </a:spDef>
-    <a:lnDef>
-      <a:spPr/>
-      <a:bodyPr/>
-      <a:lstStyle/>
-      <a:style>
-        <a:lnRef idx="2">
-          <a:schemeClr val="accent1"/>
-        </a:lnRef>
-        <a:fillRef idx="0">
-          <a:schemeClr val="accent1"/>
-        </a:fillRef>
-        <a:effectRef idx="1">
-          <a:schemeClr val="accent1"/>
-        </a:effectRef>
-        <a:fontRef idx="minor">
-          <a:schemeClr val="tx1"/>
-        </a:fontRef>
-      </a:style>
-    </a:lnDef>
-  </a:objectDefaults>
-  <a:extraClrSchemeLst/>
 </a:theme>
 </file>
 
@@ -8216,46 +8493,5 @@
       </a:bgFillStyleLst>
     </a:fmtScheme>
   </a:themeElements>
-  <a:objectDefaults>
-    <a:spDef>
-      <a:spPr/>
-      <a:bodyPr/>
-      <a:lstStyle/>
-      <a:style>
-        <a:lnRef idx="1">
-          <a:schemeClr val="accent1"/>
-        </a:lnRef>
-        <a:fillRef idx="3">
-          <a:schemeClr val="accent1"/>
-        </a:fillRef>
-        <a:effectRef idx="2">
-          <a:schemeClr val="accent1"/>
-        </a:effectRef>
-        <a:fontRef idx="minor">
-          <a:schemeClr val="lt1"/>
-        </a:fontRef>
-      </a:style>
-    </a:spDef>
-    <a:lnDef>
-      <a:spPr/>
-      <a:bodyPr/>
-      <a:lstStyle/>
-      <a:style>
-        <a:lnRef idx="2">
-          <a:schemeClr val="accent1"/>
-        </a:lnRef>
-        <a:fillRef idx="0">
-          <a:schemeClr val="accent1"/>
-        </a:fillRef>
-        <a:effectRef idx="1">
-          <a:schemeClr val="accent1"/>
-        </a:effectRef>
-        <a:fontRef idx="minor">
-          <a:schemeClr val="tx1"/>
-        </a:fontRef>
-      </a:style>
-    </a:lnDef>
-  </a:objectDefaults>
-  <a:extraClrSchemeLst/>
 </a:theme>
 </file>